--- a/curso/pptx/S27.pptx
+++ b/curso/pptx/S27.pptx
@@ -3890,8 +3890,8 @@
         </p:nvSpPr>
         <p:spPr>
           <a:xfrm>
-            <a:off x="640000" y="420000"/>
-            <a:ext cx="10912000" cy="420000"/>
+            <a:off x="10652000" y="380000"/>
+            <a:ext cx="900000" cy="800000"/>
           </a:xfrm>
           <a:prstGeom prst="rect">
             <a:avLst/>
@@ -3906,17 +3906,17 @@
           <a:p>
             <a:pPr>
               <a:spcAft>
-                <a:spcPts val="810"/>
-              </a:spcAft>
-            </a:pPr>
-            <a:r>
-              <a:rPr sz="1800" b="1">
+                <a:spcPts val="1980"/>
+              </a:spcAft>
+            </a:pPr>
+            <a:r>
+              <a:rPr sz="4400" b="0">
                 <a:solidFill>
                   <a:srgbClr val="1F2A44"/>
                 </a:solidFill>
                 <a:latin typeface="Nunito Sans"/>
               </a:rPr>
-              <a:t>🦉 Aula de Filosofía</a:t>
+              <a:t>🙃</a:t>
             </a:r>
           </a:p>
         </p:txBody>

--- a/curso/pptx/S27.pptx
+++ b/curso/pptx/S27.pptx
@@ -471,426 +471,6 @@
     </a:lvl9pPr>
   </p:notesStyle>
 </p:notesMaster>
-</file>
-
-<file path=ppt/notesSlides/notesSlide1.xml><?xml version="1.0" encoding="utf-8"?>
-<p:notes xmlns:a="http://schemas.openxmlformats.org/drawingml/2006/main" xmlns:p="http://schemas.openxmlformats.org/presentationml/2006/main" xmlns:r="http://schemas.openxmlformats.org/officeDocument/2006/relationships">
-  <p:cSld>
-    <p:spTree>
-      <p:nvGrpSpPr>
-        <p:cNvPr id="1" name=""/>
-        <p:cNvGrpSpPr/>
-        <p:nvPr/>
-      </p:nvGrpSpPr>
-      <p:grpSpPr>
-        <a:xfrm>
-          <a:off x="0" y="0"/>
-          <a:ext cx="0" cy="0"/>
-          <a:chOff x="0" y="0"/>
-          <a:chExt cx="0" cy="0"/>
-        </a:xfrm>
-      </p:grpSpPr>
-      <p:sp>
-        <p:nvSpPr>
-          <p:cNvPr id="2" name="Slide Image Placeholder 1"/>
-          <p:cNvSpPr>
-            <a:spLocks noGrp="1"/>
-          </p:cNvSpPr>
-          <p:nvPr>
-            <p:ph type="sldImg" idx="2"/>
-          </p:nvPr>
-        </p:nvSpPr>
-        <p:spPr/>
-      </p:sp>
-      <p:sp>
-        <p:nvSpPr>
-          <p:cNvPr id="3" name="Notes Placeholder 2"/>
-          <p:cNvSpPr>
-            <a:spLocks noGrp="1"/>
-          </p:cNvSpPr>
-          <p:nvPr>
-            <p:ph type="body" idx="3" sz="quarter"/>
-          </p:nvPr>
-        </p:nvSpPr>
-        <p:spPr/>
-        <p:txBody>
-          <a:bodyPr/>
-          <a:lstStyle/>
-          <a:p>
-            <a:r>
-              <a:t>3 minutos. Sin apuntes. Es para recordar, no cuenta para nota.</a:t>
-            </a:r>
-          </a:p>
-        </p:txBody>
-      </p:sp>
-      <p:sp>
-        <p:nvSpPr>
-          <p:cNvPr id="4" name="Slide Number Placeholder 3"/>
-          <p:cNvSpPr>
-            <a:spLocks noGrp="1"/>
-          </p:cNvSpPr>
-          <p:nvPr>
-            <p:ph type="sldNum" idx="5" sz="quarter"/>
-          </p:nvPr>
-        </p:nvSpPr>
-        <p:spPr/>
-      </p:sp>
-    </p:spTree>
-  </p:cSld>
-  <p:clrMapOvr>
-    <a:masterClrMapping/>
-  </p:clrMapOvr>
-</p:notes>
-</file>
-
-<file path=ppt/notesSlides/notesSlide2.xml><?xml version="1.0" encoding="utf-8"?>
-<p:notes xmlns:a="http://schemas.openxmlformats.org/drawingml/2006/main" xmlns:p="http://schemas.openxmlformats.org/presentationml/2006/main" xmlns:r="http://schemas.openxmlformats.org/officeDocument/2006/relationships">
-  <p:cSld>
-    <p:spTree>
-      <p:nvGrpSpPr>
-        <p:cNvPr id="1" name=""/>
-        <p:cNvGrpSpPr/>
-        <p:nvPr/>
-      </p:nvGrpSpPr>
-      <p:grpSpPr>
-        <a:xfrm>
-          <a:off x="0" y="0"/>
-          <a:ext cx="0" cy="0"/>
-          <a:chOff x="0" y="0"/>
-          <a:chExt cx="0" cy="0"/>
-        </a:xfrm>
-      </p:grpSpPr>
-      <p:sp>
-        <p:nvSpPr>
-          <p:cNvPr id="2" name="Slide Image Placeholder 1"/>
-          <p:cNvSpPr>
-            <a:spLocks noGrp="1"/>
-          </p:cNvSpPr>
-          <p:nvPr>
-            <p:ph type="sldImg" idx="2"/>
-          </p:nvPr>
-        </p:nvSpPr>
-        <p:spPr/>
-      </p:sp>
-      <p:sp>
-        <p:nvSpPr>
-          <p:cNvPr id="3" name="Notes Placeholder 2"/>
-          <p:cNvSpPr>
-            <a:spLocks noGrp="1"/>
-          </p:cNvSpPr>
-          <p:nvPr>
-            <p:ph type="body" idx="3" sz="quarter"/>
-          </p:nvPr>
-        </p:nvSpPr>
-        <p:spPr/>
-        <p:txBody>
-          <a:bodyPr/>
-          <a:lstStyle/>
-          <a:p>
-            <a:r>
-              <a:t>3 minutos. Sin apuntes. Es para recordar, no cuenta para nota.</a:t>
-            </a:r>
-          </a:p>
-        </p:txBody>
-      </p:sp>
-      <p:sp>
-        <p:nvSpPr>
-          <p:cNvPr id="4" name="Slide Number Placeholder 3"/>
-          <p:cNvSpPr>
-            <a:spLocks noGrp="1"/>
-          </p:cNvSpPr>
-          <p:nvPr>
-            <p:ph type="sldNum" idx="5" sz="quarter"/>
-          </p:nvPr>
-        </p:nvSpPr>
-        <p:spPr/>
-      </p:sp>
-    </p:spTree>
-  </p:cSld>
-  <p:clrMapOvr>
-    <a:masterClrMapping/>
-  </p:clrMapOvr>
-</p:notes>
-</file>
-
-<file path=ppt/notesSlides/notesSlide3.xml><?xml version="1.0" encoding="utf-8"?>
-<p:notes xmlns:a="http://schemas.openxmlformats.org/drawingml/2006/main" xmlns:p="http://schemas.openxmlformats.org/presentationml/2006/main" xmlns:r="http://schemas.openxmlformats.org/officeDocument/2006/relationships">
-  <p:cSld>
-    <p:spTree>
-      <p:nvGrpSpPr>
-        <p:cNvPr id="1" name=""/>
-        <p:cNvGrpSpPr/>
-        <p:nvPr/>
-      </p:nvGrpSpPr>
-      <p:grpSpPr>
-        <a:xfrm>
-          <a:off x="0" y="0"/>
-          <a:ext cx="0" cy="0"/>
-          <a:chOff x="0" y="0"/>
-          <a:chExt cx="0" cy="0"/>
-        </a:xfrm>
-      </p:grpSpPr>
-      <p:sp>
-        <p:nvSpPr>
-          <p:cNvPr id="2" name="Slide Image Placeholder 1"/>
-          <p:cNvSpPr>
-            <a:spLocks noGrp="1"/>
-          </p:cNvSpPr>
-          <p:nvPr>
-            <p:ph type="sldImg" idx="2"/>
-          </p:nvPr>
-        </p:nvSpPr>
-        <p:spPr/>
-      </p:sp>
-      <p:sp>
-        <p:nvSpPr>
-          <p:cNvPr id="3" name="Notes Placeholder 2"/>
-          <p:cNvSpPr>
-            <a:spLocks noGrp="1"/>
-          </p:cNvSpPr>
-          <p:nvPr>
-            <p:ph type="body" idx="3" sz="quarter"/>
-          </p:nvPr>
-        </p:nvSpPr>
-        <p:spPr/>
-        <p:txBody>
-          <a:bodyPr/>
-          <a:lstStyle/>
-          <a:p>
-            <a:r>
-              <a:t>Nadie tiene que contestar: solo pensarlo.</a:t>
-            </a:r>
-          </a:p>
-        </p:txBody>
-      </p:sp>
-      <p:sp>
-        <p:nvSpPr>
-          <p:cNvPr id="4" name="Slide Number Placeholder 3"/>
-          <p:cNvSpPr>
-            <a:spLocks noGrp="1"/>
-          </p:cNvSpPr>
-          <p:nvPr>
-            <p:ph type="sldNum" idx="5" sz="quarter"/>
-          </p:nvPr>
-        </p:nvSpPr>
-        <p:spPr/>
-      </p:sp>
-    </p:spTree>
-  </p:cSld>
-  <p:clrMapOvr>
-    <a:masterClrMapping/>
-  </p:clrMapOvr>
-</p:notes>
-</file>
-
-<file path=ppt/notesSlides/notesSlide4.xml><?xml version="1.0" encoding="utf-8"?>
-<p:notes xmlns:a="http://schemas.openxmlformats.org/drawingml/2006/main" xmlns:p="http://schemas.openxmlformats.org/presentationml/2006/main" xmlns:r="http://schemas.openxmlformats.org/officeDocument/2006/relationships">
-  <p:cSld>
-    <p:spTree>
-      <p:nvGrpSpPr>
-        <p:cNvPr id="1" name=""/>
-        <p:cNvGrpSpPr/>
-        <p:nvPr/>
-      </p:nvGrpSpPr>
-      <p:grpSpPr>
-        <a:xfrm>
-          <a:off x="0" y="0"/>
-          <a:ext cx="0" cy="0"/>
-          <a:chOff x="0" y="0"/>
-          <a:chExt cx="0" cy="0"/>
-        </a:xfrm>
-      </p:grpSpPr>
-      <p:sp>
-        <p:nvSpPr>
-          <p:cNvPr id="2" name="Slide Image Placeholder 1"/>
-          <p:cNvSpPr>
-            <a:spLocks noGrp="1"/>
-          </p:cNvSpPr>
-          <p:nvPr>
-            <p:ph type="sldImg" idx="2"/>
-          </p:nvPr>
-        </p:nvSpPr>
-        <p:spPr/>
-      </p:sp>
-      <p:sp>
-        <p:nvSpPr>
-          <p:cNvPr id="3" name="Notes Placeholder 2"/>
-          <p:cNvSpPr>
-            <a:spLocks noGrp="1"/>
-          </p:cNvSpPr>
-          <p:nvPr>
-            <p:ph type="body" idx="3" sz="quarter"/>
-          </p:nvPr>
-        </p:nvSpPr>
-        <p:spPr/>
-        <p:txBody>
-          <a:bodyPr/>
-          <a:lstStyle/>
-          <a:p>
-            <a:r>
-              <a:t>Dejar unos segundos para que piensen la respuesta fácil antes de enseñar los pasos.</a:t>
-            </a:r>
-          </a:p>
-        </p:txBody>
-      </p:sp>
-      <p:sp>
-        <p:nvSpPr>
-          <p:cNvPr id="4" name="Slide Number Placeholder 3"/>
-          <p:cNvSpPr>
-            <a:spLocks noGrp="1"/>
-          </p:cNvSpPr>
-          <p:nvPr>
-            <p:ph type="sldNum" idx="5" sz="quarter"/>
-          </p:nvPr>
-        </p:nvSpPr>
-        <p:spPr/>
-      </p:sp>
-    </p:spTree>
-  </p:cSld>
-  <p:clrMapOvr>
-    <a:masterClrMapping/>
-  </p:clrMapOvr>
-</p:notes>
-</file>
-
-<file path=ppt/notesSlides/notesSlide5.xml><?xml version="1.0" encoding="utf-8"?>
-<p:notes xmlns:a="http://schemas.openxmlformats.org/drawingml/2006/main" xmlns:p="http://schemas.openxmlformats.org/presentationml/2006/main" xmlns:r="http://schemas.openxmlformats.org/officeDocument/2006/relationships">
-  <p:cSld>
-    <p:spTree>
-      <p:nvGrpSpPr>
-        <p:cNvPr id="1" name=""/>
-        <p:cNvGrpSpPr/>
-        <p:nvPr/>
-      </p:nvGrpSpPr>
-      <p:grpSpPr>
-        <a:xfrm>
-          <a:off x="0" y="0"/>
-          <a:ext cx="0" cy="0"/>
-          <a:chOff x="0" y="0"/>
-          <a:chExt cx="0" cy="0"/>
-        </a:xfrm>
-      </p:grpSpPr>
-      <p:sp>
-        <p:nvSpPr>
-          <p:cNvPr id="2" name="Slide Image Placeholder 1"/>
-          <p:cNvSpPr>
-            <a:spLocks noGrp="1"/>
-          </p:cNvSpPr>
-          <p:nvPr>
-            <p:ph type="sldImg" idx="2"/>
-          </p:nvPr>
-        </p:nvSpPr>
-        <p:spPr/>
-      </p:sp>
-      <p:sp>
-        <p:nvSpPr>
-          <p:cNvPr id="3" name="Notes Placeholder 2"/>
-          <p:cNvSpPr>
-            <a:spLocks noGrp="1"/>
-          </p:cNvSpPr>
-          <p:nvPr>
-            <p:ph type="body" idx="3" sz="quarter"/>
-          </p:nvPr>
-        </p:nvSpPr>
-        <p:spPr/>
-        <p:txBody>
-          <a:bodyPr/>
-          <a:lstStyle/>
-          <a:p>
-            <a:r>
-              <a:t>Dejar 2 minutos para que lo escriban. La diapositiva siguiente muestra el resumen.</a:t>
-            </a:r>
-          </a:p>
-        </p:txBody>
-      </p:sp>
-      <p:sp>
-        <p:nvSpPr>
-          <p:cNvPr id="4" name="Slide Number Placeholder 3"/>
-          <p:cNvSpPr>
-            <a:spLocks noGrp="1"/>
-          </p:cNvSpPr>
-          <p:nvPr>
-            <p:ph type="sldNum" idx="5" sz="quarter"/>
-          </p:nvPr>
-        </p:nvSpPr>
-        <p:spPr/>
-      </p:sp>
-    </p:spTree>
-  </p:cSld>
-  <p:clrMapOvr>
-    <a:masterClrMapping/>
-  </p:clrMapOvr>
-</p:notes>
-</file>
-
-<file path=ppt/notesSlides/notesSlide6.xml><?xml version="1.0" encoding="utf-8"?>
-<p:notes xmlns:a="http://schemas.openxmlformats.org/drawingml/2006/main" xmlns:p="http://schemas.openxmlformats.org/presentationml/2006/main" xmlns:r="http://schemas.openxmlformats.org/officeDocument/2006/relationships">
-  <p:cSld>
-    <p:spTree>
-      <p:nvGrpSpPr>
-        <p:cNvPr id="1" name=""/>
-        <p:cNvGrpSpPr/>
-        <p:nvPr/>
-      </p:nvGrpSpPr>
-      <p:grpSpPr>
-        <a:xfrm>
-          <a:off x="0" y="0"/>
-          <a:ext cx="0" cy="0"/>
-          <a:chOff x="0" y="0"/>
-          <a:chExt cx="0" cy="0"/>
-        </a:xfrm>
-      </p:grpSpPr>
-      <p:sp>
-        <p:nvSpPr>
-          <p:cNvPr id="2" name="Slide Image Placeholder 1"/>
-          <p:cNvSpPr>
-            <a:spLocks noGrp="1"/>
-          </p:cNvSpPr>
-          <p:nvPr>
-            <p:ph type="sldImg" idx="2"/>
-          </p:nvPr>
-        </p:nvSpPr>
-        <p:spPr/>
-      </p:sp>
-      <p:sp>
-        <p:nvSpPr>
-          <p:cNvPr id="3" name="Notes Placeholder 2"/>
-          <p:cNvSpPr>
-            <a:spLocks noGrp="1"/>
-          </p:cNvSpPr>
-          <p:nvPr>
-            <p:ph type="body" idx="3" sz="quarter"/>
-          </p:nvPr>
-        </p:nvSpPr>
-        <p:spPr/>
-        <p:txBody>
-          <a:bodyPr/>
-          <a:lstStyle/>
-          <a:p>
-            <a:r>
-              <a:t>Buscar: «falacia de autoridad ejemplos» · «ad verecundiam explicación»</a:t>
-            </a:r>
-          </a:p>
-        </p:txBody>
-      </p:sp>
-      <p:sp>
-        <p:nvSpPr>
-          <p:cNvPr id="4" name="Slide Number Placeholder 3"/>
-          <p:cNvSpPr>
-            <a:spLocks noGrp="1"/>
-          </p:cNvSpPr>
-          <p:nvPr>
-            <p:ph type="sldNum" idx="5" sz="quarter"/>
-          </p:nvPr>
-        </p:nvSpPr>
-        <p:spPr/>
-      </p:sp>
-    </p:spTree>
-  </p:cSld>
-  <p:clrMapOvr>
-    <a:masterClrMapping/>
-  </p:clrMapOvr>
-</p:notes>
 </file>
 
 <file path=ppt/slideLayouts/slideLayout1.xml><?xml version="1.0" encoding="utf-8"?>

--- a/curso/pptx/S27.pptx
+++ b/curso/pptx/S27.pptx
@@ -3799,7 +3799,7 @@
                 </a:solidFill>
                 <a:latin typeface="Nunito Sans"/>
               </a:rPr>
-              <a:t>Kevin sigue a un gamer con dos millones de seguidores. El gamer dice que unas gominolas de vitaminas «te hacen más listo».</a:t>
+              <a:t>Un chico sigue a un gamer con dos millones de seguidores. El gamer dice que unas gominolas de vitaminas «te hacen más listo».</a:t>
             </a:r>
           </a:p>
         </p:txBody>
@@ -4726,7 +4726,7 @@
                 </a:solidFill>
                 <a:latin typeface="Nunito Sans"/>
               </a:rPr>
-              <a:t>Un vídeo del servicio de salud: una médica con bata blanca explica cómo lavarse bien las manos. Omar: «El truco de la bata blanca. Falacia».</a:t>
+              <a:t>Un vídeo del servicio de salud: una médica con bata blanca explica cómo lavarse bien las manos. Un chico: «El truco de la bata blanca. Falacia».</a:t>
             </a:r>
           </a:p>
         </p:txBody>

--- a/curso/pptx/S27.pptx
+++ b/curso/pptx/S27.pptx
@@ -22,6 +22,7 @@
     <p:sldId id="270" r:id="rId22"/>
     <p:sldId id="271" r:id="rId23"/>
     <p:sldId id="272" r:id="rId24"/>
+    <p:sldId id="273" r:id="rId25"/>
   </p:sldIdLst>
   <p:sldSz cx="12192000" cy="6858000" type="screen4x3"/>
   <p:notesSz cx="6858000" cy="9144000"/>
@@ -3535,7 +3536,7 @@
                 </a:solidFill>
                 <a:latin typeface="Nunito Sans"/>
               </a:rPr>
-              <a:t>PENSAMIENTO CRÍTICO · SESIÓN 27 · UNIDAD 5 · AUTORIDAD E INFLUENCIA</a:t>
+              <a:t>PENSAMIENTO CRÍTICO · SESIÓN 27 · UNIDAD 5 · FALACIAS II: RAZONAR MAL</a:t>
             </a:r>
           </a:p>
         </p:txBody>
@@ -3574,7 +3575,7 @@
                 </a:solidFill>
                 <a:latin typeface="Fredoka"/>
               </a:rPr>
-              <a:t>La falacia de autoridad</a:t>
+              <a:t>Pendiente resbaladiza</a:t>
             </a:r>
           </a:p>
         </p:txBody>
@@ -3613,7 +3614,7 @@
                 </a:solidFill>
                 <a:latin typeface="Nunito Sans"/>
               </a:rPr>
-              <a:t>La falacia de autoridad es creer algo solo porque lo dice alguien famoso o que parece experto, sin mirar si sabe del tema.</a:t>
+              <a:t>La pendiente resbaladiza encadena consecuencias cada vez peores sin dar razones de que cada paso lleve al siguiente.</a:t>
             </a:r>
           </a:p>
         </p:txBody>
@@ -3717,7 +3718,7 @@
                 </a:solidFill>
                 <a:latin typeface="Fredoka"/>
               </a:rPr>
-              <a:t>Caso 1 · El gamer y las vitaminas</a:t>
+              <a:t>Caso 2 · Los deberes de Lengua</a:t>
             </a:r>
           </a:p>
         </p:txBody>
@@ -3799,7 +3800,7 @@
                 </a:solidFill>
                 <a:latin typeface="Nunito Sans"/>
               </a:rPr>
-              <a:t>Un chico sigue a un gamer con dos millones de seguidores. El gamer dice que unas gominolas de vitaminas «te hacen más listo».</a:t>
+              <a:t>Un chico: «Si hoy no hago los deberes de Lengua, suspenderé, repetiré, dejaré el instituto y nunca encontraré trabajo».</a:t>
             </a:r>
           </a:p>
         </p:txBody>
@@ -3847,7 +3848,7 @@
                 </a:solidFill>
                 <a:latin typeface="Nunito Sans"/>
               </a:rPr>
-              <a:t>¿Quién lo dice? Un gamer: sabe de videojuegos, no de alimentación.</a:t>
+              <a:t>¿Cuántos pasos? Cuatro, cada uno peor.</a:t>
             </a:r>
           </a:p>
           <a:p>
@@ -3872,7 +3873,7 @@
                 </a:solidFill>
                 <a:latin typeface="Nunito Sans"/>
               </a:rPr>
-              <a:t>¿Tiene intereses? Puede que cobre por anunciarlas: hay que mirarlo.</a:t>
+              <a:t>¿Tiene razones alguno? No: un día sin deberes no suspende una asignatura.</a:t>
             </a:r>
           </a:p>
           <a:p>
@@ -3897,7 +3898,7 @@
                 </a:solidFill>
                 <a:latin typeface="Nunito Sans"/>
               </a:rPr>
-              <a:t>¿Da pruebas? No: solo su palabra. Y sus seguidores no son pruebas.</a:t>
+              <a:t>Cada salto necesita una razón, y no hay ninguna.</a:t>
             </a:r>
           </a:p>
           <a:p>
@@ -3922,7 +3923,7 @@
                 </a:solidFill>
                 <a:latin typeface="Nunito Sans"/>
               </a:rPr>
-              <a:t>Conclusión: falacia de autoridad, con el truco del famoso.</a:t>
+              <a:t>Conclusión: pendiente resbaladiza. Hacer los deberes está bien, pero esa razón no vale.</a:t>
             </a:r>
           </a:p>
         </p:txBody>
@@ -4026,7 +4027,7 @@
                 </a:solidFill>
                 <a:latin typeface="Fredoka"/>
               </a:rPr>
-              <a:t>Caso 2 · La bata blanca</a:t>
+              <a:t>Caso 3 · Una cadena real</a:t>
             </a:r>
           </a:p>
         </p:txBody>
@@ -4108,7 +4109,7 @@
                 </a:solidFill>
                 <a:latin typeface="Nunito Sans"/>
               </a:rPr>
-              <a:t>Anuncio de champú: una mujer con bata blanca, en un laboratorio, dice que el champú «repara el pelo desde dentro».</a:t>
+              <a:t>Una chica tiene el móvil al 5 %: «Si no lo cargo, se apagará esta tarde y no podré avisar a mi madre al salir de entrenar».</a:t>
             </a:r>
           </a:p>
         </p:txBody>
@@ -4156,7 +4157,7 @@
                 </a:solidFill>
                 <a:latin typeface="Nunito Sans"/>
               </a:rPr>
-              <a:t>¿Quién es? No lo dicen: puede ser una actriz.</a:t>
+              <a:t>¿Cuántos pasos? Dos.</a:t>
             </a:r>
           </a:p>
           <a:p>
@@ -4181,7 +4182,7 @@
                 </a:solidFill>
                 <a:latin typeface="Nunito Sans"/>
               </a:rPr>
-              <a:t>La bata y el laboratorio son decorado: dan aspecto de ciencia.</a:t>
+              <a:t>¿Cada paso tiene razón? Sí: con un 5 % de batería, el móvil se apaga pronto.</a:t>
             </a:r>
           </a:p>
           <a:p>
@@ -4206,7 +4207,7 @@
                 </a:solidFill>
                 <a:latin typeface="Nunito Sans"/>
               </a:rPr>
-              <a:t>¿Hay pruebas? No: «desde dentro» no explica nada.</a:t>
+              <a:t>¿Es exagerado el final? No: no poder avisar es algo real y pequeño.</a:t>
             </a:r>
           </a:p>
           <a:p>
@@ -4231,7 +4232,7 @@
                 </a:solidFill>
                 <a:latin typeface="Nunito Sans"/>
               </a:rPr>
-              <a:t>Conclusión: falacia de autoridad, con el truco de la bata blanca. La ropa no es una razón.</a:t>
+              <a:t>Conclusión: no es falacia. Algunas consecuencias son reales cuando cada paso está bien apoyado.</a:t>
             </a:r>
           </a:p>
         </p:txBody>
@@ -4245,315 +4246,6 @@
 </file>
 
 <file path=ppt/slides/slide12.xml><?xml version="1.0" encoding="utf-8"?>
-<p:sld xmlns:a="http://schemas.openxmlformats.org/drawingml/2006/main" xmlns:p="http://schemas.openxmlformats.org/presentationml/2006/main" xmlns:r="http://schemas.openxmlformats.org/officeDocument/2006/relationships">
-  <p:cSld>
-    <p:bg>
-      <p:bgPr>
-        <a:solidFill>
-          <a:srgbClr val="FBF7EF"/>
-        </a:solidFill>
-        <a:effectLst/>
-      </p:bgPr>
-    </p:bg>
-    <p:spTree>
-      <p:nvGrpSpPr>
-        <p:cNvPr id="1" name=""/>
-        <p:cNvGrpSpPr/>
-        <p:nvPr/>
-      </p:nvGrpSpPr>
-      <p:grpSpPr/>
-      <p:sp>
-        <p:nvSpPr>
-          <p:cNvPr id="2" name="TextBox 1"/>
-          <p:cNvSpPr txBox="1"/>
-          <p:nvPr/>
-        </p:nvSpPr>
-        <p:spPr>
-          <a:xfrm>
-            <a:off x="640000" y="380000"/>
-            <a:ext cx="10912000" cy="420000"/>
-          </a:xfrm>
-          <a:prstGeom prst="rect">
-            <a:avLst/>
-          </a:prstGeom>
-          <a:noFill/>
-        </p:spPr>
-        <p:txBody>
-          <a:bodyPr wrap="square">
-            <a:spAutoFit/>
-          </a:bodyPr>
-          <a:lstStyle/>
-          <a:p>
-            <a:pPr>
-              <a:spcAft>
-                <a:spcPts val="630"/>
-              </a:spcAft>
-            </a:pPr>
-            <a:r>
-              <a:rPr sz="1400" b="1">
-                <a:solidFill>
-                  <a:srgbClr val="E8793A"/>
-                </a:solidFill>
-                <a:latin typeface="Nunito Sans"/>
-              </a:rPr>
-              <a:t>BLOQUE 2 · CASOS RESUELTOS</a:t>
-            </a:r>
-          </a:p>
-        </p:txBody>
-      </p:sp>
-      <p:sp>
-        <p:nvSpPr>
-          <p:cNvPr id="3" name="TextBox 2"/>
-          <p:cNvSpPr txBox="1"/>
-          <p:nvPr/>
-        </p:nvSpPr>
-        <p:spPr>
-          <a:xfrm>
-            <a:off x="640000" y="760000"/>
-            <a:ext cx="10912000" cy="800000"/>
-          </a:xfrm>
-          <a:prstGeom prst="rect">
-            <a:avLst/>
-          </a:prstGeom>
-          <a:noFill/>
-        </p:spPr>
-        <p:txBody>
-          <a:bodyPr wrap="square">
-            <a:spAutoFit/>
-          </a:bodyPr>
-          <a:lstStyle/>
-          <a:p>
-            <a:pPr>
-              <a:spcAft>
-                <a:spcPts val="1710"/>
-              </a:spcAft>
-            </a:pPr>
-            <a:r>
-              <a:rPr sz="3800" b="1">
-                <a:solidFill>
-                  <a:srgbClr val="1F2A44"/>
-                </a:solidFill>
-                <a:latin typeface="Fredoka"/>
-              </a:rPr>
-              <a:t>Caso 3 · «Los expertos dicen»</a:t>
-            </a:r>
-          </a:p>
-        </p:txBody>
-      </p:sp>
-      <p:sp>
-        <p:nvSpPr>
-          <p:cNvPr id="4" name="Rectangle 3"/>
-          <p:cNvSpPr/>
-          <p:nvPr/>
-        </p:nvSpPr>
-        <p:spPr>
-          <a:xfrm>
-            <a:off x="640000" y="1600000"/>
-            <a:ext cx="10912000" cy="1100000"/>
-          </a:xfrm>
-          <a:prstGeom prst="rect">
-            <a:avLst/>
-          </a:prstGeom>
-          <a:solidFill>
-            <a:srgbClr val="FFFFFF"/>
-          </a:solidFill>
-          <a:ln>
-            <a:noFill/>
-          </a:ln>
-        </p:spPr>
-        <p:style>
-          <a:lnRef idx="1">
-            <a:schemeClr val="accent1"/>
-          </a:lnRef>
-          <a:fillRef idx="3">
-            <a:schemeClr val="accent1"/>
-          </a:fillRef>
-          <a:effectRef idx="2">
-            <a:schemeClr val="accent1"/>
-          </a:effectRef>
-          <a:fontRef idx="minor">
-            <a:schemeClr val="lt1"/>
-          </a:fontRef>
-        </p:style>
-        <p:txBody>
-          <a:bodyPr rtlCol="0" anchor="ctr"/>
-          <a:lstStyle/>
-          <a:p>
-            <a:pPr algn="ctr"/>
-          </a:p>
-        </p:txBody>
-      </p:sp>
-      <p:sp>
-        <p:nvSpPr>
-          <p:cNvPr id="5" name="TextBox 4"/>
-          <p:cNvSpPr txBox="1"/>
-          <p:nvPr/>
-        </p:nvSpPr>
-        <p:spPr>
-          <a:xfrm>
-            <a:off x="840000" y="1650000"/>
-            <a:ext cx="10512000" cy="1000000"/>
-          </a:xfrm>
-          <a:prstGeom prst="rect">
-            <a:avLst/>
-          </a:prstGeom>
-          <a:noFill/>
-        </p:spPr>
-        <p:txBody>
-          <a:bodyPr wrap="square" anchor="ctr">
-            <a:spAutoFit/>
-          </a:bodyPr>
-          <a:lstStyle/>
-          <a:p>
-            <a:pPr>
-              <a:spcAft>
-                <a:spcPts val="1170"/>
-              </a:spcAft>
-            </a:pPr>
-            <a:r>
-              <a:rPr sz="2600" b="1">
-                <a:solidFill>
-                  <a:srgbClr val="1F2A44"/>
-                </a:solidFill>
-                <a:latin typeface="Nunito Sans"/>
-              </a:rPr>
-              <a:t>Un vídeo de TikTok: «Los expertos dicen que dormir con el móvil al lado da dolor de cabeza».</a:t>
-            </a:r>
-          </a:p>
-        </p:txBody>
-      </p:sp>
-      <p:sp>
-        <p:nvSpPr>
-          <p:cNvPr id="6" name="TextBox 5"/>
-          <p:cNvSpPr txBox="1"/>
-          <p:nvPr/>
-        </p:nvSpPr>
-        <p:spPr>
-          <a:xfrm>
-            <a:off x="640000" y="2900000"/>
-            <a:ext cx="10912000" cy="3500000"/>
-          </a:xfrm>
-          <a:prstGeom prst="rect">
-            <a:avLst/>
-          </a:prstGeom>
-          <a:noFill/>
-        </p:spPr>
-        <p:txBody>
-          <a:bodyPr wrap="square">
-            <a:spAutoFit/>
-          </a:bodyPr>
-          <a:lstStyle/>
-          <a:p>
-            <a:pPr>
-              <a:spcAft>
-                <a:spcPts val="1080"/>
-              </a:spcAft>
-            </a:pPr>
-            <a:r>
-              <a:rPr sz="2400" b="1">
-                <a:solidFill>
-                  <a:srgbClr val="E8793A"/>
-                </a:solidFill>
-                <a:latin typeface="Nunito Sans"/>
-              </a:rPr>
-              <a:t>1. </a:t>
-            </a:r>
-            <a:r>
-              <a:rPr sz="2400" b="0">
-                <a:solidFill>
-                  <a:srgbClr val="1F2A44"/>
-                </a:solidFill>
-                <a:latin typeface="Nunito Sans"/>
-              </a:rPr>
-              <a:t>¿Qué expertos? No dice nombres ni dónde trabajan.</a:t>
-            </a:r>
-          </a:p>
-          <a:p>
-            <a:pPr>
-              <a:spcAft>
-                <a:spcPts val="1080"/>
-              </a:spcAft>
-            </a:pPr>
-            <a:r>
-              <a:rPr sz="2400" b="1">
-                <a:solidFill>
-                  <a:srgbClr val="E8793A"/>
-                </a:solidFill>
-                <a:latin typeface="Nunito Sans"/>
-              </a:rPr>
-              <a:t>2. </a:t>
-            </a:r>
-            <a:r>
-              <a:rPr sz="2400" b="0">
-                <a:solidFill>
-                  <a:srgbClr val="1F2A44"/>
-                </a:solidFill>
-                <a:latin typeface="Nunito Sans"/>
-              </a:rPr>
-              <a:t>¿Qué pruebas? Ninguna.</a:t>
-            </a:r>
-          </a:p>
-          <a:p>
-            <a:pPr>
-              <a:spcAft>
-                <a:spcPts val="1080"/>
-              </a:spcAft>
-            </a:pPr>
-            <a:r>
-              <a:rPr sz="2400" b="1">
-                <a:solidFill>
-                  <a:srgbClr val="E8793A"/>
-                </a:solidFill>
-                <a:latin typeface="Nunito Sans"/>
-              </a:rPr>
-              <a:t>3. </a:t>
-            </a:r>
-            <a:r>
-              <a:rPr sz="2400" b="0">
-                <a:solidFill>
-                  <a:srgbClr val="1F2A44"/>
-                </a:solidFill>
-                <a:latin typeface="Nunito Sans"/>
-              </a:rPr>
-              <a:t>¿Es falso seguro? No: puede ser verdad o no. Pero así no lo puedo saber.</a:t>
-            </a:r>
-          </a:p>
-          <a:p>
-            <a:pPr>
-              <a:spcAft>
-                <a:spcPts val="1080"/>
-              </a:spcAft>
-            </a:pPr>
-            <a:r>
-              <a:rPr sz="2400" b="1">
-                <a:solidFill>
-                  <a:srgbClr val="E8793A"/>
-                </a:solidFill>
-                <a:latin typeface="Nunito Sans"/>
-              </a:rPr>
-              <a:t>4. </a:t>
-            </a:r>
-            <a:r>
-              <a:rPr sz="2400" b="0">
-                <a:solidFill>
-                  <a:srgbClr val="1F2A44"/>
-                </a:solidFill>
-                <a:latin typeface="Nunito Sans"/>
-              </a:rPr>
-              <a:t>Conclusión: creerlo solo por «los expertos dicen» es fiarse a ciegas. Busco quiénes son y cómo lo saben.</a:t>
-            </a:r>
-          </a:p>
-        </p:txBody>
-      </p:sp>
-    </p:spTree>
-  </p:cSld>
-  <p:clrMapOvr>
-    <a:masterClrMapping/>
-  </p:clrMapOvr>
-</p:sld>
-</file>
-
-<file path=ppt/slides/slide13.xml><?xml version="1.0" encoding="utf-8"?>
 <p:sld xmlns:a="http://schemas.openxmlformats.org/drawingml/2006/main" xmlns:p="http://schemas.openxmlformats.org/presentationml/2006/main" xmlns:r="http://schemas.openxmlformats.org/officeDocument/2006/relationships">
   <p:cSld>
     <p:bg>
@@ -4644,7 +4336,7 @@
                 </a:solidFill>
                 <a:latin typeface="Fredoka"/>
               </a:rPr>
-              <a:t>⚠ Una bata de verdad</a:t>
+              <a:t>⚠ Solo en las fiestas</a:t>
             </a:r>
           </a:p>
         </p:txBody>
@@ -4726,7 +4418,7 @@
                 </a:solidFill>
                 <a:latin typeface="Nunito Sans"/>
               </a:rPr>
-              <a:t>Un vídeo del servicio de salud: una médica con bata blanca explica cómo lavarse bien las manos. Un chico: «El truco de la bata blanca. Falacia».</a:t>
+              <a:t>Un chico: «Si empiezas fumando “solo en fiestas”, es fácil que acabes fumando cada día. La nicotina engancha».</a:t>
             </a:r>
           </a:p>
         </p:txBody>
@@ -4774,7 +4466,7 @@
                 </a:solidFill>
                 <a:latin typeface="Nunito Sans"/>
               </a:rPr>
-              <a:t>Hay bata blanca… ¿es falacia de autoridad?</a:t>
+              <a:t>Empieza con algo pequeño y acaba mal… ¿pendiente resbaladiza?</a:t>
             </a:r>
           </a:p>
           <a:p>
@@ -4799,7 +4491,7 @@
                 </a:solidFill>
                 <a:latin typeface="Nunito Sans"/>
               </a:rPr>
-              <a:t>La bata blanca es uno de los trucos, sí.</a:t>
+              <a:t>Parece el tobogán: un paso pequeño y un final malo.</a:t>
             </a:r>
           </a:p>
           <a:p>
@@ -4824,7 +4516,7 @@
                 </a:solidFill>
                 <a:latin typeface="Nunito Sans"/>
               </a:rPr>
-              <a:t>Pero aquí no es decorado: es médica de verdad y habla de su campo.</a:t>
+              <a:t>Pero hay razones para el paso: la nicotina engancha, y eso está muy estudiado.</a:t>
             </a:r>
           </a:p>
           <a:p>
@@ -4849,7 +4541,7 @@
                 </a:solidFill>
                 <a:latin typeface="Nunito Sans"/>
               </a:rPr>
-              <a:t>Dice lo mismo que casi todos los médicos, y no vende nada.</a:t>
+              <a:t>Y no dice «seguro»: dice que es fácil que pase. No exagera.</a:t>
             </a:r>
           </a:p>
           <a:p>
@@ -4874,7 +4566,111 @@
                 </a:solidFill>
                 <a:latin typeface="Nunito Sans"/>
               </a:rPr>
-              <a:t>Conclusión: no es falacia. La bata no es una razón, pero tampoco la quita: mira quién es y qué sabe.</a:t>
+              <a:t>Conclusión: no es falacia. Lo que importa es si cada paso tiene razones, no si el final es malo.</a:t>
+            </a:r>
+          </a:p>
+        </p:txBody>
+      </p:sp>
+    </p:spTree>
+  </p:cSld>
+  <p:clrMapOvr>
+    <a:masterClrMapping/>
+  </p:clrMapOvr>
+</p:sld>
+</file>
+
+<file path=ppt/slides/slide13.xml><?xml version="1.0" encoding="utf-8"?>
+<p:sld xmlns:a="http://schemas.openxmlformats.org/drawingml/2006/main" xmlns:p="http://schemas.openxmlformats.org/presentationml/2006/main" xmlns:r="http://schemas.openxmlformats.org/officeDocument/2006/relationships">
+  <p:cSld>
+    <p:bg>
+      <p:bgPr>
+        <a:solidFill>
+          <a:srgbClr val="1F2A44"/>
+        </a:solidFill>
+        <a:effectLst/>
+      </p:bgPr>
+    </p:bg>
+    <p:spTree>
+      <p:nvGrpSpPr>
+        <p:cNvPr id="1" name=""/>
+        <p:cNvGrpSpPr/>
+        <p:nvPr/>
+      </p:nvGrpSpPr>
+      <p:grpSpPr/>
+      <p:sp>
+        <p:nvSpPr>
+          <p:cNvPr id="2" name="TextBox 1"/>
+          <p:cNvSpPr txBox="1"/>
+          <p:nvPr/>
+        </p:nvSpPr>
+        <p:spPr>
+          <a:xfrm>
+            <a:off x="640000" y="2300000"/>
+            <a:ext cx="10912000" cy="500000"/>
+          </a:xfrm>
+          <a:prstGeom prst="rect">
+            <a:avLst/>
+          </a:prstGeom>
+          <a:noFill/>
+        </p:spPr>
+        <p:txBody>
+          <a:bodyPr wrap="square">
+            <a:spAutoFit/>
+          </a:bodyPr>
+          <a:lstStyle/>
+          <a:p>
+            <a:pPr>
+              <a:spcAft>
+                <a:spcPts val="810"/>
+              </a:spcAft>
+            </a:pPr>
+            <a:r>
+              <a:rPr sz="1800" b="1">
+                <a:solidFill>
+                  <a:srgbClr val="F4B183"/>
+                </a:solidFill>
+                <a:latin typeface="Nunito Sans"/>
+              </a:rPr>
+              <a:t>BLOQUE 3</a:t>
+            </a:r>
+          </a:p>
+        </p:txBody>
+      </p:sp>
+      <p:sp>
+        <p:nvSpPr>
+          <p:cNvPr id="3" name="TextBox 2"/>
+          <p:cNvSpPr txBox="1"/>
+          <p:nvPr/>
+        </p:nvSpPr>
+        <p:spPr>
+          <a:xfrm>
+            <a:off x="640000" y="2800000"/>
+            <a:ext cx="10912000" cy="800000"/>
+          </a:xfrm>
+          <a:prstGeom prst="rect">
+            <a:avLst/>
+          </a:prstGeom>
+          <a:noFill/>
+        </p:spPr>
+        <p:txBody>
+          <a:bodyPr wrap="square">
+            <a:spAutoFit/>
+          </a:bodyPr>
+          <a:lstStyle/>
+          <a:p>
+            <a:pPr>
+              <a:spcAft>
+                <a:spcPts val="2160"/>
+              </a:spcAft>
+            </a:pPr>
+            <a:r>
+              <a:rPr sz="4800" b="1">
+                <a:solidFill>
+                  <a:srgbClr val="FBF7EF"/>
+                </a:solidFill>
+                <a:latin typeface="Fredoka"/>
+              </a:rPr>
+              <a:t>No toda cadena es falacia</a:t>
             </a:r>
           </a:p>
         </p:txBody>
@@ -4939,7 +4735,7 @@
                 </a:solidFill>
                 <a:latin typeface="Nunito Sans"/>
               </a:rPr>
-              <a:t>LO DE HOY EN TRES LÍNEAS</a:t>
+              <a:t>BLOQUE 3 · NO TODA CADENA ES FALACIA</a:t>
             </a:r>
           </a:p>
         </p:txBody>
@@ -4978,21 +4774,64 @@
                 </a:solidFill>
                 <a:latin typeface="Fredoka"/>
               </a:rPr>
-              <a:t>Escríbelo tú primero, sin mirar</a:t>
-            </a:r>
-          </a:p>
-        </p:txBody>
-      </p:sp>
-      <p:sp>
-        <p:nvSpPr>
-          <p:cNvPr id="4" name="TextBox 3"/>
+              <a:t>¿Tobogán o consecuencia real?</a:t>
+            </a:r>
+          </a:p>
+        </p:txBody>
+      </p:sp>
+      <p:sp>
+        <p:nvSpPr>
+          <p:cNvPr id="4" name="Rectangle 3"/>
+          <p:cNvSpPr/>
+          <p:nvPr/>
+        </p:nvSpPr>
+        <p:spPr>
+          <a:xfrm>
+            <a:off x="640000" y="1650000"/>
+            <a:ext cx="5306000" cy="4400000"/>
+          </a:xfrm>
+          <a:prstGeom prst="rect">
+            <a:avLst/>
+          </a:prstGeom>
+          <a:solidFill>
+            <a:srgbClr val="FBE3D2"/>
+          </a:solidFill>
+          <a:ln>
+            <a:noFill/>
+          </a:ln>
+        </p:spPr>
+        <p:style>
+          <a:lnRef idx="1">
+            <a:schemeClr val="accent1"/>
+          </a:lnRef>
+          <a:fillRef idx="3">
+            <a:schemeClr val="accent1"/>
+          </a:fillRef>
+          <a:effectRef idx="2">
+            <a:schemeClr val="accent1"/>
+          </a:effectRef>
+          <a:fontRef idx="minor">
+            <a:schemeClr val="lt1"/>
+          </a:fontRef>
+        </p:style>
+        <p:txBody>
+          <a:bodyPr rtlCol="0" anchor="ctr"/>
+          <a:lstStyle/>
+          <a:p>
+            <a:pPr algn="ctr"/>
+          </a:p>
+        </p:txBody>
+      </p:sp>
+      <p:sp>
+        <p:nvSpPr>
+          <p:cNvPr id="5" name="TextBox 4"/>
           <p:cNvSpPr txBox="1"/>
           <p:nvPr/>
         </p:nvSpPr>
         <p:spPr>
           <a:xfrm>
-            <a:off x="640000" y="1800000"/>
-            <a:ext cx="10912000" cy="1500000"/>
+            <a:off x="840000" y="1750000"/>
+            <a:ext cx="4906000" cy="600000"/>
           </a:xfrm>
           <a:prstGeom prst="rect">
             <a:avLst/>
@@ -5007,17 +4846,295 @@
           <a:p>
             <a:pPr>
               <a:spcAft>
+                <a:spcPts val="1260"/>
+              </a:spcAft>
+            </a:pPr>
+            <a:r>
+              <a:rPr sz="2800" b="1">
+                <a:solidFill>
+                  <a:srgbClr val="C2531C"/>
+                </a:solidFill>
+                <a:latin typeface="Nunito Sans"/>
+              </a:rPr>
+              <a:t>Pendiente resbaladiza</a:t>
+            </a:r>
+          </a:p>
+        </p:txBody>
+      </p:sp>
+      <p:sp>
+        <p:nvSpPr>
+          <p:cNvPr id="6" name="TextBox 5"/>
+          <p:cNvSpPr txBox="1"/>
+          <p:nvPr/>
+        </p:nvSpPr>
+        <p:spPr>
+          <a:xfrm>
+            <a:off x="840000" y="2400000"/>
+            <a:ext cx="4906000" cy="3500000"/>
+          </a:xfrm>
+          <a:prstGeom prst="rect">
+            <a:avLst/>
+          </a:prstGeom>
+          <a:noFill/>
+        </p:spPr>
+        <p:txBody>
+          <a:bodyPr wrap="square">
+            <a:spAutoFit/>
+          </a:bodyPr>
+          <a:lstStyle/>
+          <a:p>
+            <a:pPr>
+              <a:spcAft>
                 <a:spcPts val="1170"/>
               </a:spcAft>
             </a:pPr>
             <a:r>
+              <a:rPr sz="2600" b="1">
+                <a:solidFill>
+                  <a:srgbClr val="E8793A"/>
+                </a:solidFill>
+                <a:latin typeface="Nunito Sans"/>
+              </a:rPr>
+              <a:t>• </a:t>
+            </a:r>
+            <a:r>
               <a:rPr sz="2600" b="0">
                 <a:solidFill>
-                  <a:srgbClr val="4A5568"/>
-                </a:solidFill>
-                <a:latin typeface="Nunito Sans"/>
-              </a:rPr>
-              <a:t>Dos minutos. Después lo comparamos.</a:t>
+                  <a:srgbClr val="1F2A44"/>
+                </a:solidFill>
+                <a:latin typeface="Nunito Sans"/>
+              </a:rPr>
+              <a:t>Pasos sin razones</a:t>
+            </a:r>
+          </a:p>
+          <a:p>
+            <a:pPr>
+              <a:spcAft>
+                <a:spcPts val="1170"/>
+              </a:spcAft>
+            </a:pPr>
+            <a:r>
+              <a:rPr sz="2600" b="1">
+                <a:solidFill>
+                  <a:srgbClr val="E8793A"/>
+                </a:solidFill>
+                <a:latin typeface="Nunito Sans"/>
+              </a:rPr>
+              <a:t>• </a:t>
+            </a:r>
+            <a:r>
+              <a:rPr sz="2600" b="0">
+                <a:solidFill>
+                  <a:srgbClr val="1F2A44"/>
+                </a:solidFill>
+                <a:latin typeface="Nunito Sans"/>
+              </a:rPr>
+              <a:t>Final exagerado</a:t>
+            </a:r>
+          </a:p>
+          <a:p>
+            <a:pPr>
+              <a:spcAft>
+                <a:spcPts val="1170"/>
+              </a:spcAft>
+            </a:pPr>
+            <a:r>
+              <a:rPr sz="2600" b="1">
+                <a:solidFill>
+                  <a:srgbClr val="E8793A"/>
+                </a:solidFill>
+                <a:latin typeface="Nunito Sans"/>
+              </a:rPr>
+              <a:t>• </a:t>
+            </a:r>
+            <a:r>
+              <a:rPr sz="2600" b="0">
+                <a:solidFill>
+                  <a:srgbClr val="1F2A44"/>
+                </a:solidFill>
+                <a:latin typeface="Nunito Sans"/>
+              </a:rPr>
+              <a:t>Cada paso se da por seguro</a:t>
+            </a:r>
+          </a:p>
+        </p:txBody>
+      </p:sp>
+      <p:sp>
+        <p:nvSpPr>
+          <p:cNvPr id="7" name="Rectangle 6"/>
+          <p:cNvSpPr/>
+          <p:nvPr/>
+        </p:nvSpPr>
+        <p:spPr>
+          <a:xfrm>
+            <a:off x="6246000" y="1650000"/>
+            <a:ext cx="5306000" cy="4400000"/>
+          </a:xfrm>
+          <a:prstGeom prst="rect">
+            <a:avLst/>
+          </a:prstGeom>
+          <a:solidFill>
+            <a:srgbClr val="EAF0F7"/>
+          </a:solidFill>
+          <a:ln>
+            <a:noFill/>
+          </a:ln>
+        </p:spPr>
+        <p:style>
+          <a:lnRef idx="1">
+            <a:schemeClr val="accent1"/>
+          </a:lnRef>
+          <a:fillRef idx="3">
+            <a:schemeClr val="accent1"/>
+          </a:fillRef>
+          <a:effectRef idx="2">
+            <a:schemeClr val="accent1"/>
+          </a:effectRef>
+          <a:fontRef idx="minor">
+            <a:schemeClr val="lt1"/>
+          </a:fontRef>
+        </p:style>
+        <p:txBody>
+          <a:bodyPr rtlCol="0" anchor="ctr"/>
+          <a:lstStyle/>
+          <a:p>
+            <a:pPr algn="ctr"/>
+          </a:p>
+        </p:txBody>
+      </p:sp>
+      <p:sp>
+        <p:nvSpPr>
+          <p:cNvPr id="8" name="TextBox 7"/>
+          <p:cNvSpPr txBox="1"/>
+          <p:nvPr/>
+        </p:nvSpPr>
+        <p:spPr>
+          <a:xfrm>
+            <a:off x="6446000" y="1750000"/>
+            <a:ext cx="4906000" cy="600000"/>
+          </a:xfrm>
+          <a:prstGeom prst="rect">
+            <a:avLst/>
+          </a:prstGeom>
+          <a:noFill/>
+        </p:spPr>
+        <p:txBody>
+          <a:bodyPr wrap="square">
+            <a:spAutoFit/>
+          </a:bodyPr>
+          <a:lstStyle/>
+          <a:p>
+            <a:pPr>
+              <a:spcAft>
+                <a:spcPts val="1260"/>
+              </a:spcAft>
+            </a:pPr>
+            <a:r>
+              <a:rPr sz="2800" b="1">
+                <a:solidFill>
+                  <a:srgbClr val="2F6FB5"/>
+                </a:solidFill>
+                <a:latin typeface="Nunito Sans"/>
+              </a:rPr>
+              <a:t>Consecuencia real</a:t>
+            </a:r>
+          </a:p>
+        </p:txBody>
+      </p:sp>
+      <p:sp>
+        <p:nvSpPr>
+          <p:cNvPr id="9" name="TextBox 8"/>
+          <p:cNvSpPr txBox="1"/>
+          <p:nvPr/>
+        </p:nvSpPr>
+        <p:spPr>
+          <a:xfrm>
+            <a:off x="6446000" y="2400000"/>
+            <a:ext cx="4906000" cy="3500000"/>
+          </a:xfrm>
+          <a:prstGeom prst="rect">
+            <a:avLst/>
+          </a:prstGeom>
+          <a:noFill/>
+        </p:spPr>
+        <p:txBody>
+          <a:bodyPr wrap="square">
+            <a:spAutoFit/>
+          </a:bodyPr>
+          <a:lstStyle/>
+          <a:p>
+            <a:pPr>
+              <a:spcAft>
+                <a:spcPts val="1170"/>
+              </a:spcAft>
+            </a:pPr>
+            <a:r>
+              <a:rPr sz="2600" b="1">
+                <a:solidFill>
+                  <a:srgbClr val="E8793A"/>
+                </a:solidFill>
+                <a:latin typeface="Nunito Sans"/>
+              </a:rPr>
+              <a:t>• </a:t>
+            </a:r>
+            <a:r>
+              <a:rPr sz="2600" b="0">
+                <a:solidFill>
+                  <a:srgbClr val="1F2A44"/>
+                </a:solidFill>
+                <a:latin typeface="Nunito Sans"/>
+              </a:rPr>
+              <a:t>Cada paso con razones</a:t>
+            </a:r>
+          </a:p>
+          <a:p>
+            <a:pPr>
+              <a:spcAft>
+                <a:spcPts val="1170"/>
+              </a:spcAft>
+            </a:pPr>
+            <a:r>
+              <a:rPr sz="2600" b="1">
+                <a:solidFill>
+                  <a:srgbClr val="E8793A"/>
+                </a:solidFill>
+                <a:latin typeface="Nunito Sans"/>
+              </a:rPr>
+              <a:t>• </a:t>
+            </a:r>
+            <a:r>
+              <a:rPr sz="2600" b="0">
+                <a:solidFill>
+                  <a:srgbClr val="1F2A44"/>
+                </a:solidFill>
+                <a:latin typeface="Nunito Sans"/>
+              </a:rPr>
+              <a:t>Dice «puede pasar», no «pasará seguro»</a:t>
+            </a:r>
+          </a:p>
+          <a:p>
+            <a:pPr>
+              <a:spcAft>
+                <a:spcPts val="1170"/>
+              </a:spcAft>
+            </a:pPr>
+            <a:r>
+              <a:rPr sz="2600" b="1">
+                <a:solidFill>
+                  <a:srgbClr val="E8793A"/>
+                </a:solidFill>
+                <a:latin typeface="Nunito Sans"/>
+              </a:rPr>
+              <a:t>• </a:t>
+            </a:r>
+            <a:r>
+              <a:rPr sz="2600" b="0">
+                <a:solidFill>
+                  <a:srgbClr val="1F2A44"/>
+                </a:solidFill>
+                <a:latin typeface="Nunito Sans"/>
+              </a:rPr>
+              <a:t>Se puede comprobar cada paso</a:t>
             </a:r>
           </a:p>
         </p:txBody>
@@ -5095,8 +5212,8 @@
         </p:nvSpPr>
         <p:spPr>
           <a:xfrm>
-            <a:off x="640000" y="1300000"/>
-            <a:ext cx="10912000" cy="4800000"/>
+            <a:off x="640000" y="760000"/>
+            <a:ext cx="10912000" cy="800000"/>
           </a:xfrm>
           <a:prstGeom prst="rect">
             <a:avLst/>
@@ -5111,76 +5228,56 @@
           <a:p>
             <a:pPr>
               <a:spcAft>
-                <a:spcPts val="1350"/>
-              </a:spcAft>
-            </a:pPr>
-            <a:r>
-              <a:rPr sz="3000" b="1">
-                <a:solidFill>
-                  <a:srgbClr val="E8793A"/>
-                </a:solidFill>
-                <a:latin typeface="Nunito Sans"/>
-              </a:rPr>
-              <a:t>1. </a:t>
-            </a:r>
-            <a:r>
-              <a:rPr sz="3000" b="0">
+                <a:spcPts val="1710"/>
+              </a:spcAft>
+            </a:pPr>
+            <a:r>
+              <a:rPr sz="3800" b="1">
                 <a:solidFill>
                   <a:srgbClr val="1F2A44"/>
                 </a:solidFill>
-                <a:latin typeface="Nunito Sans"/>
-              </a:rPr>
-              <a:t>La falacia de autoridad es creer algo solo porque lo dice alguien importante que no sabe del tema.</a:t>
-            </a:r>
-          </a:p>
-          <a:p>
-            <a:pPr>
-              <a:spcAft>
-                <a:spcPts val="1350"/>
-              </a:spcAft>
-            </a:pPr>
-            <a:r>
-              <a:rPr sz="3000" b="1">
-                <a:solidFill>
-                  <a:srgbClr val="E8793A"/>
-                </a:solidFill>
-                <a:latin typeface="Nunito Sans"/>
-              </a:rPr>
-              <a:t>2. </a:t>
-            </a:r>
-            <a:r>
-              <a:rPr sz="3000" b="0">
-                <a:solidFill>
-                  <a:srgbClr val="1F2A44"/>
-                </a:solidFill>
-                <a:latin typeface="Nunito Sans"/>
-              </a:rPr>
-              <a:t>Sus trucos: el famoso, la bata blanca y «los expertos dicen».</a:t>
-            </a:r>
-          </a:p>
-          <a:p>
-            <a:pPr>
-              <a:spcAft>
-                <a:spcPts val="1350"/>
-              </a:spcAft>
-            </a:pPr>
-            <a:r>
-              <a:rPr sz="3000" b="1">
-                <a:solidFill>
-                  <a:srgbClr val="E8793A"/>
-                </a:solidFill>
-                <a:latin typeface="Nunito Sans"/>
-              </a:rPr>
-              <a:t>3. </a:t>
-            </a:r>
-            <a:r>
-              <a:rPr sz="3000" b="0">
-                <a:solidFill>
-                  <a:srgbClr val="1F2A44"/>
-                </a:solidFill>
-                <a:latin typeface="Nunito Sans"/>
-              </a:rPr>
-              <a:t>Fiarse de un experto de verdad, en su campo y con pruebas, no es falacia.</a:t>
+                <a:latin typeface="Fredoka"/>
+              </a:rPr>
+              <a:t>Escríbelo tú primero, sin mirar</a:t>
+            </a:r>
+          </a:p>
+        </p:txBody>
+      </p:sp>
+      <p:sp>
+        <p:nvSpPr>
+          <p:cNvPr id="4" name="TextBox 3"/>
+          <p:cNvSpPr txBox="1"/>
+          <p:nvPr/>
+        </p:nvSpPr>
+        <p:spPr>
+          <a:xfrm>
+            <a:off x="640000" y="1800000"/>
+            <a:ext cx="10912000" cy="1500000"/>
+          </a:xfrm>
+          <a:prstGeom prst="rect">
+            <a:avLst/>
+          </a:prstGeom>
+          <a:noFill/>
+        </p:spPr>
+        <p:txBody>
+          <a:bodyPr wrap="square">
+            <a:spAutoFit/>
+          </a:bodyPr>
+          <a:lstStyle/>
+          <a:p>
+            <a:pPr>
+              <a:spcAft>
+                <a:spcPts val="1170"/>
+              </a:spcAft>
+            </a:pPr>
+            <a:r>
+              <a:rPr sz="2600" b="0">
+                <a:solidFill>
+                  <a:srgbClr val="4A5568"/>
+                </a:solidFill>
+                <a:latin typeface="Nunito Sans"/>
+              </a:rPr>
+              <a:t>Dos minutos. Después lo comparamos.</a:t>
             </a:r>
           </a:p>
         </p:txBody>
@@ -5199,7 +5296,7 @@
     <p:bg>
       <p:bgPr>
         <a:solidFill>
-          <a:srgbClr val="1F2A44"/>
+          <a:srgbClr val="FBF7EF"/>
         </a:solidFill>
         <a:effectLst/>
       </p:bgPr>
@@ -5241,11 +5338,11 @@
             <a:r>
               <a:rPr sz="1400" b="1">
                 <a:solidFill>
-                  <a:srgbClr val="F4B183"/>
-                </a:solidFill>
-                <a:latin typeface="Nunito Sans"/>
-              </a:rPr>
-              <a:t>VÍDEO</a:t>
+                  <a:srgbClr val="E8793A"/>
+                </a:solidFill>
+                <a:latin typeface="Nunito Sans"/>
+              </a:rPr>
+              <a:t>LO DE HOY EN TRES LÍNEAS</a:t>
             </a:r>
           </a:p>
         </p:txBody>
@@ -5258,8 +5355,8 @@
         </p:nvSpPr>
         <p:spPr>
           <a:xfrm>
-            <a:off x="640000" y="760000"/>
-            <a:ext cx="10912000" cy="800000"/>
+            <a:off x="640000" y="1300000"/>
+            <a:ext cx="10912000" cy="4800000"/>
           </a:xfrm>
           <a:prstGeom prst="rect">
             <a:avLst/>
@@ -5274,56 +5371,76 @@
           <a:p>
             <a:pPr>
               <a:spcAft>
-                <a:spcPts val="1620"/>
-              </a:spcAft>
-            </a:pPr>
-            <a:r>
-              <a:rPr sz="3600" b="1">
-                <a:solidFill>
-                  <a:srgbClr val="FBF7EF"/>
-                </a:solidFill>
-                <a:latin typeface="Fredoka"/>
-              </a:rPr>
-              <a:t>La falacia de autoridad con ejemplos de anuncios</a:t>
-            </a:r>
-          </a:p>
-        </p:txBody>
-      </p:sp>
-      <p:sp>
-        <p:nvSpPr>
-          <p:cNvPr id="4" name="TextBox 3"/>
-          <p:cNvSpPr txBox="1"/>
-          <p:nvPr/>
-        </p:nvSpPr>
-        <p:spPr>
-          <a:xfrm>
-            <a:off x="640000" y="2200000"/>
-            <a:ext cx="10912000" cy="2000000"/>
-          </a:xfrm>
-          <a:prstGeom prst="rect">
-            <a:avLst/>
-          </a:prstGeom>
-          <a:noFill/>
-        </p:spPr>
-        <p:txBody>
-          <a:bodyPr wrap="square">
-            <a:spAutoFit/>
-          </a:bodyPr>
-          <a:lstStyle/>
-          <a:p>
-            <a:pPr>
-              <a:spcAft>
-                <a:spcPts val="1080"/>
-              </a:spcAft>
-            </a:pPr>
-            <a:r>
-              <a:rPr sz="2400" b="0">
-                <a:solidFill>
-                  <a:srgbClr val="C9D3E6"/>
-                </a:solidFill>
-                <a:latin typeface="Nunito Sans"/>
-              </a:rPr>
-              <a:t>Que reconozcan los trucos del famoso y de la bata blanca en anuncios reales.</a:t>
+                <a:spcPts val="1350"/>
+              </a:spcAft>
+            </a:pPr>
+            <a:r>
+              <a:rPr sz="3000" b="1">
+                <a:solidFill>
+                  <a:srgbClr val="E8793A"/>
+                </a:solidFill>
+                <a:latin typeface="Nunito Sans"/>
+              </a:rPr>
+              <a:t>1. </a:t>
+            </a:r>
+            <a:r>
+              <a:rPr sz="3000" b="0">
+                <a:solidFill>
+                  <a:srgbClr val="1F2A44"/>
+                </a:solidFill>
+                <a:latin typeface="Nunito Sans"/>
+              </a:rPr>
+              <a:t>La pendiente resbaladiza encadena consecuencias cada vez peores sin dar razones.</a:t>
+            </a:r>
+          </a:p>
+          <a:p>
+            <a:pPr>
+              <a:spcAft>
+                <a:spcPts val="1350"/>
+              </a:spcAft>
+            </a:pPr>
+            <a:r>
+              <a:rPr sz="3000" b="1">
+                <a:solidFill>
+                  <a:srgbClr val="E8793A"/>
+                </a:solidFill>
+                <a:latin typeface="Nunito Sans"/>
+              </a:rPr>
+              <a:t>2. </a:t>
+            </a:r>
+            <a:r>
+              <a:rPr sz="3000" b="0">
+                <a:solidFill>
+                  <a:srgbClr val="1F2A44"/>
+                </a:solidFill>
+                <a:latin typeface="Nunito Sans"/>
+              </a:rPr>
+              <a:t>Para desmontarla: ¿por qué un paso lleva seguro al siguiente?</a:t>
+            </a:r>
+          </a:p>
+          <a:p>
+            <a:pPr>
+              <a:spcAft>
+                <a:spcPts val="1350"/>
+              </a:spcAft>
+            </a:pPr>
+            <a:r>
+              <a:rPr sz="3000" b="1">
+                <a:solidFill>
+                  <a:srgbClr val="E8793A"/>
+                </a:solidFill>
+                <a:latin typeface="Nunito Sans"/>
+              </a:rPr>
+              <a:t>3. </a:t>
+            </a:r>
+            <a:r>
+              <a:rPr sz="3000" b="0">
+                <a:solidFill>
+                  <a:srgbClr val="1F2A44"/>
+                </a:solidFill>
+                <a:latin typeface="Nunito Sans"/>
+              </a:rPr>
+              <a:t>No toda cadena es falacia: si cada paso tiene razones, el aviso vale.</a:t>
             </a:r>
           </a:p>
         </p:txBody>
@@ -5388,6 +5505,149 @@
                 </a:solidFill>
                 <a:latin typeface="Nunito Sans"/>
               </a:rPr>
+              <a:t>VÍDEO</a:t>
+            </a:r>
+          </a:p>
+        </p:txBody>
+      </p:sp>
+      <p:sp>
+        <p:nvSpPr>
+          <p:cNvPr id="3" name="TextBox 2"/>
+          <p:cNvSpPr txBox="1"/>
+          <p:nvPr/>
+        </p:nvSpPr>
+        <p:spPr>
+          <a:xfrm>
+            <a:off x="640000" y="760000"/>
+            <a:ext cx="10912000" cy="800000"/>
+          </a:xfrm>
+          <a:prstGeom prst="rect">
+            <a:avLst/>
+          </a:prstGeom>
+          <a:noFill/>
+        </p:spPr>
+        <p:txBody>
+          <a:bodyPr wrap="square">
+            <a:spAutoFit/>
+          </a:bodyPr>
+          <a:lstStyle/>
+          <a:p>
+            <a:pPr>
+              <a:spcAft>
+                <a:spcPts val="1620"/>
+              </a:spcAft>
+            </a:pPr>
+            <a:r>
+              <a:rPr sz="3600" b="1">
+                <a:solidFill>
+                  <a:srgbClr val="FBF7EF"/>
+                </a:solidFill>
+                <a:latin typeface="Fredoka"/>
+              </a:rPr>
+              <a:t>La falacia de la pendiente resbaladiza</a:t>
+            </a:r>
+          </a:p>
+        </p:txBody>
+      </p:sp>
+      <p:sp>
+        <p:nvSpPr>
+          <p:cNvPr id="4" name="TextBox 3"/>
+          <p:cNvSpPr txBox="1"/>
+          <p:nvPr/>
+        </p:nvSpPr>
+        <p:spPr>
+          <a:xfrm>
+            <a:off x="640000" y="2200000"/>
+            <a:ext cx="10912000" cy="2000000"/>
+          </a:xfrm>
+          <a:prstGeom prst="rect">
+            <a:avLst/>
+          </a:prstGeom>
+          <a:noFill/>
+        </p:spPr>
+        <p:txBody>
+          <a:bodyPr wrap="square">
+            <a:spAutoFit/>
+          </a:bodyPr>
+          <a:lstStyle/>
+          <a:p>
+            <a:pPr>
+              <a:spcAft>
+                <a:spcPts val="1080"/>
+              </a:spcAft>
+            </a:pPr>
+            <a:r>
+              <a:rPr sz="2400" b="0">
+                <a:solidFill>
+                  <a:srgbClr val="C9D3E6"/>
+                </a:solidFill>
+                <a:latin typeface="Nunito Sans"/>
+              </a:rPr>
+              <a:t>Ver cadenas de consecuencias exageradas, a menudo con humor.</a:t>
+            </a:r>
+          </a:p>
+        </p:txBody>
+      </p:sp>
+    </p:spTree>
+  </p:cSld>
+  <p:clrMapOvr>
+    <a:masterClrMapping/>
+  </p:clrMapOvr>
+</p:sld>
+</file>
+
+<file path=ppt/slides/slide18.xml><?xml version="1.0" encoding="utf-8"?>
+<p:sld xmlns:a="http://schemas.openxmlformats.org/drawingml/2006/main" xmlns:p="http://schemas.openxmlformats.org/presentationml/2006/main" xmlns:r="http://schemas.openxmlformats.org/officeDocument/2006/relationships">
+  <p:cSld>
+    <p:bg>
+      <p:bgPr>
+        <a:solidFill>
+          <a:srgbClr val="1F2A44"/>
+        </a:solidFill>
+        <a:effectLst/>
+      </p:bgPr>
+    </p:bg>
+    <p:spTree>
+      <p:nvGrpSpPr>
+        <p:cNvPr id="1" name=""/>
+        <p:cNvGrpSpPr/>
+        <p:nvPr/>
+      </p:nvGrpSpPr>
+      <p:grpSpPr/>
+      <p:sp>
+        <p:nvSpPr>
+          <p:cNvPr id="2" name="TextBox 1"/>
+          <p:cNvSpPr txBox="1"/>
+          <p:nvPr/>
+        </p:nvSpPr>
+        <p:spPr>
+          <a:xfrm>
+            <a:off x="640000" y="380000"/>
+            <a:ext cx="10912000" cy="420000"/>
+          </a:xfrm>
+          <a:prstGeom prst="rect">
+            <a:avLst/>
+          </a:prstGeom>
+          <a:noFill/>
+        </p:spPr>
+        <p:txBody>
+          <a:bodyPr wrap="square">
+            <a:spAutoFit/>
+          </a:bodyPr>
+          <a:lstStyle/>
+          <a:p>
+            <a:pPr>
+              <a:spcAft>
+                <a:spcPts val="630"/>
+              </a:spcAft>
+            </a:pPr>
+            <a:r>
+              <a:rPr sz="1400" b="1">
+                <a:solidFill>
+                  <a:srgbClr val="F4B183"/>
+                </a:solidFill>
+                <a:latin typeface="Nunito Sans"/>
+              </a:rPr>
               <a:t>AHORA, LA HOJA DEL DÍA</a:t>
             </a:r>
           </a:p>
@@ -5981,7 +6241,7 @@
                 </a:solidFill>
                 <a:latin typeface="Nunito Sans"/>
               </a:rPr>
-              <a:t>Un experto sabe de su tema, pero puede ______, como todos.  (sesión 26)</a:t>
+              <a:t>En un falso dilema, las opciones escondidas pueden estar en ______, en las dos a la vez o en otra distinta.  (sesión 26)</a:t>
             </a:r>
           </a:p>
           <a:p>
@@ -6006,7 +6266,7 @@
                 </a:solidFill>
                 <a:latin typeface="Nunito Sans"/>
               </a:rPr>
-              <a:t>Antes de fiarme de un experto miro su ______, el consenso, sus intereses y sus ______.  (sesión 26)</a:t>
+              <a:t>El falso dilema presenta solo ______ opciones cuando en realidad hay más.  (sesión 26)</a:t>
             </a:r>
           </a:p>
           <a:p>
@@ -6031,7 +6291,7 @@
                 </a:solidFill>
                 <a:latin typeface="Nunito Sans"/>
               </a:rPr>
-              <a:t>Pregunta que lo desmonta: ¿es eso ______ lo que he dicho?  (sesión 15)</a:t>
+              <a:t>Si la razón es ______, el argumento se cae.  (sesión 15)</a:t>
             </a:r>
           </a:p>
         </p:txBody>
@@ -6183,7 +6443,7 @@
                 </a:solidFill>
                 <a:latin typeface="Nunito Sans"/>
               </a:rPr>
-              <a:t>Un experto sabe de su tema, pero puede </a:t>
+              <a:t>En un falso dilema, las opciones escondidas pueden estar en </a:t>
             </a:r>
             <a:r>
               <a:rPr sz="2600" b="1">
@@ -6192,7 +6452,7 @@
                 </a:solidFill>
                 <a:latin typeface="Nunito Sans"/>
               </a:rPr>
-              <a:t>equivocarse</a:t>
+              <a:t>medio</a:t>
             </a:r>
             <a:r>
               <a:rPr sz="2600" b="0">
@@ -6201,7 +6461,7 @@
                 </a:solidFill>
                 <a:latin typeface="Nunito Sans"/>
               </a:rPr>
-              <a:t>, como todos.  (sesión 26)</a:t>
+              <a:t>, en las dos a la vez o en otra distinta.  (sesión 26)</a:t>
             </a:r>
           </a:p>
           <a:p>
@@ -6226,7 +6486,7 @@
                 </a:solidFill>
                 <a:latin typeface="Nunito Sans"/>
               </a:rPr>
-              <a:t>Antes de fiarme de un experto miro su </a:t>
+              <a:t>El falso dilema presenta solo </a:t>
             </a:r>
             <a:r>
               <a:rPr sz="2600" b="1">
@@ -6235,7 +6495,7 @@
                 </a:solidFill>
                 <a:latin typeface="Nunito Sans"/>
               </a:rPr>
-              <a:t>campo</a:t>
+              <a:t>dos</a:t>
             </a:r>
             <a:r>
               <a:rPr sz="2600" b="0">
@@ -6244,16 +6504,41 @@
                 </a:solidFill>
                 <a:latin typeface="Nunito Sans"/>
               </a:rPr>
-              <a:t>, el consenso, sus intereses y sus </a:t>
-            </a:r>
+              <a:t> opciones cuando en realidad hay más.  (sesión 26)</a:t>
+            </a:r>
+          </a:p>
+          <a:p>
+            <a:pPr>
+              <a:spcAft>
+                <a:spcPts val="1170"/>
+              </a:spcAft>
+            </a:pPr>
             <a:r>
               <a:rPr sz="2600" b="1">
                 <a:solidFill>
+                  <a:srgbClr val="E8793A"/>
+                </a:solidFill>
+                <a:latin typeface="Nunito Sans"/>
+              </a:rPr>
+              <a:t>3. </a:t>
+            </a:r>
+            <a:r>
+              <a:rPr sz="2600" b="0">
+                <a:solidFill>
                   <a:srgbClr val="1F2A44"/>
                 </a:solidFill>
                 <a:latin typeface="Nunito Sans"/>
               </a:rPr>
-              <a:t>pruebas</a:t>
+              <a:t>Si la razón es </a:t>
+            </a:r>
+            <a:r>
+              <a:rPr sz="2600" b="1">
+                <a:solidFill>
+                  <a:srgbClr val="1F2A44"/>
+                </a:solidFill>
+                <a:latin typeface="Nunito Sans"/>
+              </a:rPr>
+              <a:t>falsa</a:t>
             </a:r>
             <a:r>
               <a:rPr sz="2600" b="0">
@@ -6262,50 +6547,7 @@
                 </a:solidFill>
                 <a:latin typeface="Nunito Sans"/>
               </a:rPr>
-              <a:t>.  (sesión 26)</a:t>
-            </a:r>
-          </a:p>
-          <a:p>
-            <a:pPr>
-              <a:spcAft>
-                <a:spcPts val="1170"/>
-              </a:spcAft>
-            </a:pPr>
-            <a:r>
-              <a:rPr sz="2600" b="1">
-                <a:solidFill>
-                  <a:srgbClr val="E8793A"/>
-                </a:solidFill>
-                <a:latin typeface="Nunito Sans"/>
-              </a:rPr>
-              <a:t>3. </a:t>
-            </a:r>
-            <a:r>
-              <a:rPr sz="2600" b="0">
-                <a:solidFill>
-                  <a:srgbClr val="1F2A44"/>
-                </a:solidFill>
-                <a:latin typeface="Nunito Sans"/>
-              </a:rPr>
-              <a:t>Pregunta que lo desmonta: ¿es eso </a:t>
-            </a:r>
-            <a:r>
-              <a:rPr sz="2600" b="1">
-                <a:solidFill>
-                  <a:srgbClr val="1F2A44"/>
-                </a:solidFill>
-                <a:latin typeface="Nunito Sans"/>
-              </a:rPr>
-              <a:t>exactamente</a:t>
-            </a:r>
-            <a:r>
-              <a:rPr sz="2600" b="0">
-                <a:solidFill>
-                  <a:srgbClr val="1F2A44"/>
-                </a:solidFill>
-                <a:latin typeface="Nunito Sans"/>
-              </a:rPr>
-              <a:t> lo que he dicho?  (sesión 15)</a:t>
+              <a:t>, el argumento se cae.  (sesión 15)</a:t>
             </a:r>
           </a:p>
         </p:txBody>
@@ -6452,7 +6694,7 @@
                 </a:solidFill>
                 <a:latin typeface="Nunito Sans"/>
               </a:rPr>
-              <a:t>«Nueve de cada diez dentistas lo recomiendan.» Lo has oído en algún anuncio.</a:t>
+              <a:t>«Si hoy te dejo quedarte hasta las diez, mañana querrás hasta las doce, y acabarás no volviendo a casa.»</a:t>
             </a:r>
           </a:p>
         </p:txBody>
@@ -6491,7 +6733,7 @@
                 </a:solidFill>
                 <a:latin typeface="Nunito Sans"/>
               </a:rPr>
-              <a:t>¿Quiénes son esos dentistas? ¿Cómo podrías saberlo?</a:t>
+              <a:t>¿Es seguro que un paso lleva al siguiente?</a:t>
             </a:r>
           </a:p>
         </p:txBody>
@@ -6595,7 +6837,7 @@
                 </a:solidFill>
                 <a:latin typeface="Fredoka"/>
               </a:rPr>
-              <a:t>Qué es la falacia de autoridad</a:t>
+              <a:t>Cadenas de consecuencias</a:t>
             </a:r>
           </a:p>
         </p:txBody>
@@ -6660,7 +6902,7 @@
                 </a:solidFill>
                 <a:latin typeface="Nunito Sans"/>
               </a:rPr>
-              <a:t>BLOQUE 1 · QUÉ ES LA FALACIA DE AUTORIDAD</a:t>
+              <a:t>BLOQUE 1 · CADENAS DE CONSECUENCIAS</a:t>
             </a:r>
           </a:p>
         </p:txBody>
@@ -6699,7 +6941,7 @@
                 </a:solidFill>
                 <a:latin typeface="Fredoka"/>
               </a:rPr>
-              <a:t>Falacia de autoridad (ad verecundiam)</a:t>
+              <a:t>Pendiente resbaladiza</a:t>
             </a:r>
           </a:p>
         </p:txBody>
@@ -6781,7 +7023,7 @@
                 </a:solidFill>
                 <a:latin typeface="Nunito Sans"/>
               </a:rPr>
-              <a:t>Creer algo solo porque lo dice alguien importante o famoso, aunque no sea experto en ese tema.</a:t>
+              <a:t>Decir que un primer paso pequeño llevará sin remedio a una cadena de consecuencias terribles, sin dar razones de cada paso.</a:t>
             </a:r>
           </a:p>
         </p:txBody>
@@ -6829,16 +7071,48 @@
                 </a:solidFill>
                 <a:latin typeface="Nunito Sans"/>
               </a:rPr>
-              <a:t>Recuerda: una </a:t>
-            </a:r>
+              <a:t>Como un tobogán: si te subes, no puedes parar</a:t>
+            </a:r>
+          </a:p>
+          <a:p>
+            <a:pPr>
+              <a:spcAft>
+                <a:spcPts val="1260"/>
+              </a:spcAft>
+            </a:pPr>
             <a:r>
               <a:rPr sz="2800" b="1">
                 <a:solidFill>
+                  <a:srgbClr val="E8793A"/>
+                </a:solidFill>
+                <a:latin typeface="Nunito Sans"/>
+              </a:rPr>
+              <a:t>• </a:t>
+            </a:r>
+            <a:r>
+              <a:rPr sz="2800" b="0">
+                <a:solidFill>
                   <a:srgbClr val="1F2A44"/>
                 </a:solidFill>
                 <a:latin typeface="Nunito Sans"/>
               </a:rPr>
-              <a:t>falacia</a:t>
+              <a:t>Aunque cada paso sea posible, toda la cadena es poco probable</a:t>
+            </a:r>
+          </a:p>
+          <a:p>
+            <a:pPr>
+              <a:spcAft>
+                <a:spcPts val="1260"/>
+              </a:spcAft>
+            </a:pPr>
+            <a:r>
+              <a:rPr sz="2800" b="1">
+                <a:solidFill>
+                  <a:srgbClr val="E8793A"/>
+                </a:solidFill>
+                <a:latin typeface="Nunito Sans"/>
+              </a:rPr>
+              <a:t>• </a:t>
             </a:r>
             <a:r>
               <a:rPr sz="2800" b="0">
@@ -6847,93 +7121,16 @@
                 </a:solidFill>
                 <a:latin typeface="Nunito Sans"/>
               </a:rPr>
-              <a:t> parece un buen argumento y no lo es</a:t>
-            </a:r>
-          </a:p>
-          <a:p>
-            <a:pPr>
-              <a:spcAft>
-                <a:spcPts val="1260"/>
-              </a:spcAft>
-            </a:pPr>
+              <a:t>Pregunta: </a:t>
+            </a:r>
             <a:r>
               <a:rPr sz="2800" b="1">
                 <a:solidFill>
-                  <a:srgbClr val="E8793A"/>
-                </a:solidFill>
-                <a:latin typeface="Nunito Sans"/>
-              </a:rPr>
-              <a:t>• </a:t>
-            </a:r>
-            <a:r>
-              <a:rPr sz="2800" b="0">
-                <a:solidFill>
                   <a:srgbClr val="1F2A44"/>
                 </a:solidFill>
                 <a:latin typeface="Nunito Sans"/>
               </a:rPr>
-              <a:t>Fiarse de un experto </a:t>
-            </a:r>
-            <a:r>
-              <a:rPr sz="2800" b="1">
-                <a:solidFill>
-                  <a:srgbClr val="1F2A44"/>
-                </a:solidFill>
-                <a:latin typeface="Nunito Sans"/>
-              </a:rPr>
-              <a:t>de verdad</a:t>
-            </a:r>
-            <a:r>
-              <a:rPr sz="2800" b="0">
-                <a:solidFill>
-                  <a:srgbClr val="1F2A44"/>
-                </a:solidFill>
-                <a:latin typeface="Nunito Sans"/>
-              </a:rPr>
-              <a:t>, en su campo, no es falacia</a:t>
-            </a:r>
-          </a:p>
-          <a:p>
-            <a:pPr>
-              <a:spcAft>
-                <a:spcPts val="1260"/>
-              </a:spcAft>
-            </a:pPr>
-            <a:r>
-              <a:rPr sz="2800" b="1">
-                <a:solidFill>
-                  <a:srgbClr val="E8793A"/>
-                </a:solidFill>
-                <a:latin typeface="Nunito Sans"/>
-              </a:rPr>
-              <a:t>• </a:t>
-            </a:r>
-            <a:r>
-              <a:rPr sz="2800" b="0">
-                <a:solidFill>
-                  <a:srgbClr val="1F2A44"/>
-                </a:solidFill>
-                <a:latin typeface="Nunito Sans"/>
-              </a:rPr>
-              <a:t>El fallo es fiarse </a:t>
-            </a:r>
-            <a:r>
-              <a:rPr sz="2800" b="1">
-                <a:solidFill>
-                  <a:srgbClr val="1F2A44"/>
-                </a:solidFill>
-                <a:latin typeface="Nunito Sans"/>
-              </a:rPr>
-              <a:t>sin mirar</a:t>
-            </a:r>
-            <a:r>
-              <a:rPr sz="2800" b="0">
-                <a:solidFill>
-                  <a:srgbClr val="1F2A44"/>
-                </a:solidFill>
-                <a:latin typeface="Nunito Sans"/>
-              </a:rPr>
-              <a:t> las cuatro preguntas</a:t>
+              <a:t>¿por qué un paso lleva seguro al siguiente?</a:t>
             </a:r>
           </a:p>
         </p:txBody>
@@ -6998,7 +7195,7 @@
                 </a:solidFill>
                 <a:latin typeface="Nunito Sans"/>
               </a:rPr>
-              <a:t>BLOQUE 1 · QUÉ ES LA FALACIA DE AUTORIDAD</a:t>
+              <a:t>BLOQUE 1 · CADENAS DE CONSECUENCIAS</a:t>
             </a:r>
           </a:p>
         </p:txBody>
@@ -7037,7 +7234,7 @@
                 </a:solidFill>
                 <a:latin typeface="Fredoka"/>
               </a:rPr>
-              <a:t>Tres trucos de la falacia de autoridad</a:t>
+              <a:t>Cómo reconocerla</a:t>
             </a:r>
           </a:p>
         </p:txBody>
@@ -7079,13 +7276,38 @@
               <a:t>• </a:t>
             </a:r>
             <a:r>
+              <a:rPr sz="2800" b="0">
+                <a:solidFill>
+                  <a:srgbClr val="1F2A44"/>
+                </a:solidFill>
+                <a:latin typeface="Nunito Sans"/>
+              </a:rPr>
+              <a:t>Empieza con algo pequeño y acaba en algo </a:t>
+            </a:r>
+            <a:r>
               <a:rPr sz="2800" b="1">
                 <a:solidFill>
                   <a:srgbClr val="1F2A44"/>
                 </a:solidFill>
                 <a:latin typeface="Nunito Sans"/>
               </a:rPr>
-              <a:t>El famoso:</a:t>
+              <a:t>terrible</a:t>
+            </a:r>
+          </a:p>
+          <a:p>
+            <a:pPr>
+              <a:spcAft>
+                <a:spcPts val="1260"/>
+              </a:spcAft>
+            </a:pPr>
+            <a:r>
+              <a:rPr sz="2800" b="1">
+                <a:solidFill>
+                  <a:srgbClr val="E8793A"/>
+                </a:solidFill>
+                <a:latin typeface="Nunito Sans"/>
+              </a:rPr>
+              <a:t>• </a:t>
             </a:r>
             <a:r>
               <a:rPr sz="2800" b="0">
@@ -7094,7 +7316,7 @@
                 </a:solidFill>
                 <a:latin typeface="Nunito Sans"/>
               </a:rPr>
-              <a:t> un deportista o un influencer que opina de salud</a:t>
+              <a:t>Muchos «y entonces…» seguidos</a:t>
             </a:r>
           </a:p>
           <a:p>
@@ -7113,13 +7335,22 @@
               <a:t>• </a:t>
             </a:r>
             <a:r>
+              <a:rPr sz="2800" b="0">
+                <a:solidFill>
+                  <a:srgbClr val="1F2A44"/>
+                </a:solidFill>
+                <a:latin typeface="Nunito Sans"/>
+              </a:rPr>
+              <a:t>Nadie explica </a:t>
+            </a:r>
+            <a:r>
               <a:rPr sz="2800" b="1">
                 <a:solidFill>
                   <a:srgbClr val="1F2A44"/>
                 </a:solidFill>
                 <a:latin typeface="Nunito Sans"/>
               </a:rPr>
-              <a:t>La bata blanca:</a:t>
+              <a:t>por qué</a:t>
             </a:r>
             <a:r>
               <a:rPr sz="2800" b="0">
@@ -7128,7 +7359,7 @@
                 </a:solidFill>
                 <a:latin typeface="Nunito Sans"/>
               </a:rPr>
-              <a:t> alguien vestido de médico o de científico</a:t>
+              <a:t> cada paso lleva al siguiente</a:t>
             </a:r>
           </a:p>
           <a:p>
@@ -7147,22 +7378,13 @@
               <a:t>• </a:t>
             </a:r>
             <a:r>
-              <a:rPr sz="2800" b="1">
+              <a:rPr sz="2800" b="0">
                 <a:solidFill>
                   <a:srgbClr val="1F2A44"/>
                 </a:solidFill>
                 <a:latin typeface="Nunito Sans"/>
               </a:rPr>
-              <a:t>«Los expertos dicen»:</a:t>
-            </a:r>
-            <a:r>
-              <a:rPr sz="2800" b="0">
-                <a:solidFill>
-                  <a:srgbClr val="1F2A44"/>
-                </a:solidFill>
-                <a:latin typeface="Nunito Sans"/>
-              </a:rPr>
-              <a:t> expertos sin nombre y sin pruebas</a:t>
+              <a:t>Se parece a la apelación al miedo: asusta con el final (sesión 22)</a:t>
             </a:r>
           </a:p>
         </p:txBody>
@@ -7176,6 +7398,110 @@
 </file>
 
 <file path=ppt/slides/slide8.xml><?xml version="1.0" encoding="utf-8"?>
+<p:sld xmlns:a="http://schemas.openxmlformats.org/drawingml/2006/main" xmlns:p="http://schemas.openxmlformats.org/presentationml/2006/main" xmlns:r="http://schemas.openxmlformats.org/officeDocument/2006/relationships">
+  <p:cSld>
+    <p:bg>
+      <p:bgPr>
+        <a:solidFill>
+          <a:srgbClr val="1F2A44"/>
+        </a:solidFill>
+        <a:effectLst/>
+      </p:bgPr>
+    </p:bg>
+    <p:spTree>
+      <p:nvGrpSpPr>
+        <p:cNvPr id="1" name=""/>
+        <p:cNvGrpSpPr/>
+        <p:nvPr/>
+      </p:nvGrpSpPr>
+      <p:grpSpPr/>
+      <p:sp>
+        <p:nvSpPr>
+          <p:cNvPr id="2" name="TextBox 1"/>
+          <p:cNvSpPr txBox="1"/>
+          <p:nvPr/>
+        </p:nvSpPr>
+        <p:spPr>
+          <a:xfrm>
+            <a:off x="640000" y="2300000"/>
+            <a:ext cx="10912000" cy="500000"/>
+          </a:xfrm>
+          <a:prstGeom prst="rect">
+            <a:avLst/>
+          </a:prstGeom>
+          <a:noFill/>
+        </p:spPr>
+        <p:txBody>
+          <a:bodyPr wrap="square">
+            <a:spAutoFit/>
+          </a:bodyPr>
+          <a:lstStyle/>
+          <a:p>
+            <a:pPr>
+              <a:spcAft>
+                <a:spcPts val="810"/>
+              </a:spcAft>
+            </a:pPr>
+            <a:r>
+              <a:rPr sz="1800" b="1">
+                <a:solidFill>
+                  <a:srgbClr val="F4B183"/>
+                </a:solidFill>
+                <a:latin typeface="Nunito Sans"/>
+              </a:rPr>
+              <a:t>BLOQUE 2</a:t>
+            </a:r>
+          </a:p>
+        </p:txBody>
+      </p:sp>
+      <p:sp>
+        <p:nvSpPr>
+          <p:cNvPr id="3" name="TextBox 2"/>
+          <p:cNvSpPr txBox="1"/>
+          <p:nvPr/>
+        </p:nvSpPr>
+        <p:spPr>
+          <a:xfrm>
+            <a:off x="640000" y="2800000"/>
+            <a:ext cx="10912000" cy="800000"/>
+          </a:xfrm>
+          <a:prstGeom prst="rect">
+            <a:avLst/>
+          </a:prstGeom>
+          <a:noFill/>
+        </p:spPr>
+        <p:txBody>
+          <a:bodyPr wrap="square">
+            <a:spAutoFit/>
+          </a:bodyPr>
+          <a:lstStyle/>
+          <a:p>
+            <a:pPr>
+              <a:spcAft>
+                <a:spcPts val="2160"/>
+              </a:spcAft>
+            </a:pPr>
+            <a:r>
+              <a:rPr sz="4800" b="1">
+                <a:solidFill>
+                  <a:srgbClr val="FBF7EF"/>
+                </a:solidFill>
+                <a:latin typeface="Fredoka"/>
+              </a:rPr>
+              <a:t>Casos resueltos</a:t>
+            </a:r>
+          </a:p>
+        </p:txBody>
+      </p:sp>
+    </p:spTree>
+  </p:cSld>
+  <p:clrMapOvr>
+    <a:masterClrMapping/>
+  </p:clrMapOvr>
+</p:sld>
+</file>
+
+<file path=ppt/slides/slide9.xml><?xml version="1.0" encoding="utf-8"?>
 <p:sld xmlns:a="http://schemas.openxmlformats.org/drawingml/2006/main" xmlns:p="http://schemas.openxmlformats.org/presentationml/2006/main" xmlns:r="http://schemas.openxmlformats.org/officeDocument/2006/relationships">
   <p:cSld>
     <p:bg>
@@ -7227,7 +7553,7 @@
                 </a:solidFill>
                 <a:latin typeface="Nunito Sans"/>
               </a:rPr>
-              <a:t>BLOQUE 1 · QUÉ ES LA FALACIA DE AUTORIDAD</a:t>
+              <a:t>BLOQUE 2 · CASOS RESUELTOS</a:t>
             </a:r>
           </a:p>
         </p:txBody>
@@ -7266,7 +7592,7 @@
                 </a:solidFill>
                 <a:latin typeface="Fredoka"/>
               </a:rPr>
-              <a:t>Fiarse mal y fiarse bien</a:t>
+              <a:t>Caso 1 · Hasta las diez</a:t>
             </a:r>
           </a:p>
         </p:txBody>
@@ -7279,14 +7605,14 @@
         </p:nvSpPr>
         <p:spPr>
           <a:xfrm>
-            <a:off x="640000" y="1650000"/>
-            <a:ext cx="5306000" cy="4400000"/>
+            <a:off x="640000" y="1600000"/>
+            <a:ext cx="10912000" cy="1100000"/>
           </a:xfrm>
           <a:prstGeom prst="rect">
             <a:avLst/>
           </a:prstGeom>
           <a:solidFill>
-            <a:srgbClr val="FBE3D2"/>
+            <a:srgbClr val="FFFFFF"/>
           </a:solidFill>
           <a:ln>
             <a:noFill/>
@@ -7322,8 +7648,47 @@
         </p:nvSpPr>
         <p:spPr>
           <a:xfrm>
-            <a:off x="840000" y="1750000"/>
-            <a:ext cx="4906000" cy="600000"/>
+            <a:off x="840000" y="1650000"/>
+            <a:ext cx="10512000" cy="1000000"/>
+          </a:xfrm>
+          <a:prstGeom prst="rect">
+            <a:avLst/>
+          </a:prstGeom>
+          <a:noFill/>
+        </p:spPr>
+        <p:txBody>
+          <a:bodyPr wrap="square" anchor="ctr">
+            <a:spAutoFit/>
+          </a:bodyPr>
+          <a:lstStyle/>
+          <a:p>
+            <a:pPr>
+              <a:spcAft>
+                <a:spcPts val="1170"/>
+              </a:spcAft>
+            </a:pPr>
+            <a:r>
+              <a:rPr sz="2600" b="1">
+                <a:solidFill>
+                  <a:srgbClr val="1F2A44"/>
+                </a:solidFill>
+                <a:latin typeface="Nunito Sans"/>
+              </a:rPr>
+              <a:t>«Si hoy te dejo quedarte hasta las diez, mañana querrás hasta las doce, y acabarás no volviendo a casa.»</a:t>
+            </a:r>
+          </a:p>
+        </p:txBody>
+      </p:sp>
+      <p:sp>
+        <p:nvSpPr>
+          <p:cNvPr id="6" name="TextBox 5"/>
+          <p:cNvSpPr txBox="1"/>
+          <p:nvPr/>
+        </p:nvSpPr>
+        <p:spPr>
+          <a:xfrm>
+            <a:off x="640000" y="2900000"/>
+            <a:ext cx="10912000" cy="3500000"/>
           </a:xfrm>
           <a:prstGeom prst="rect">
             <a:avLst/>
@@ -7338,399 +7703,101 @@
           <a:p>
             <a:pPr>
               <a:spcAft>
-                <a:spcPts val="1260"/>
-              </a:spcAft>
-            </a:pPr>
-            <a:r>
-              <a:rPr sz="2800" b="1">
-                <a:solidFill>
-                  <a:srgbClr val="C2531C"/>
-                </a:solidFill>
-                <a:latin typeface="Nunito Sans"/>
-              </a:rPr>
-              <a:t>Falacia</a:t>
-            </a:r>
-          </a:p>
-        </p:txBody>
-      </p:sp>
-      <p:sp>
-        <p:nvSpPr>
-          <p:cNvPr id="6" name="TextBox 5"/>
-          <p:cNvSpPr txBox="1"/>
-          <p:nvPr/>
-        </p:nvSpPr>
-        <p:spPr>
-          <a:xfrm>
-            <a:off x="840000" y="2400000"/>
-            <a:ext cx="4906000" cy="3500000"/>
-          </a:xfrm>
-          <a:prstGeom prst="rect">
-            <a:avLst/>
-          </a:prstGeom>
-          <a:noFill/>
-        </p:spPr>
-        <p:txBody>
-          <a:bodyPr wrap="square">
-            <a:spAutoFit/>
-          </a:bodyPr>
-          <a:lstStyle/>
-          <a:p>
-            <a:pPr>
-              <a:spcAft>
-                <a:spcPts val="1170"/>
-              </a:spcAft>
-            </a:pPr>
-            <a:r>
-              <a:rPr sz="2600" b="1">
+                <a:spcPts val="1080"/>
+              </a:spcAft>
+            </a:pPr>
+            <a:r>
+              <a:rPr sz="2400" b="1">
                 <a:solidFill>
                   <a:srgbClr val="E8793A"/>
                 </a:solidFill>
                 <a:latin typeface="Nunito Sans"/>
               </a:rPr>
-              <a:t>• </a:t>
-            </a:r>
-            <a:r>
-              <a:rPr sz="2600" b="0">
+              <a:t>1. </a:t>
+            </a:r>
+            <a:r>
+              <a:rPr sz="2400" b="0">
                 <a:solidFill>
                   <a:srgbClr val="1F2A44"/>
                 </a:solidFill>
                 <a:latin typeface="Nunito Sans"/>
               </a:rPr>
-              <a:t>«Lo dice un futbolista, así que es sano»</a:t>
-            </a:r>
-          </a:p>
-          <a:p>
-            <a:pPr>
-              <a:spcAft>
-                <a:spcPts val="1170"/>
-              </a:spcAft>
-            </a:pPr>
-            <a:r>
-              <a:rPr sz="2600" b="1">
+              <a:t>¿Primer paso? Quedarse hasta las diez un día.</a:t>
+            </a:r>
+          </a:p>
+          <a:p>
+            <a:pPr>
+              <a:spcAft>
+                <a:spcPts val="1080"/>
+              </a:spcAft>
+            </a:pPr>
+            <a:r>
+              <a:rPr sz="2400" b="1">
                 <a:solidFill>
                   <a:srgbClr val="E8793A"/>
                 </a:solidFill>
                 <a:latin typeface="Nunito Sans"/>
               </a:rPr>
-              <a:t>• </a:t>
-            </a:r>
-            <a:r>
-              <a:rPr sz="2600" b="0">
+              <a:t>2. </a:t>
+            </a:r>
+            <a:r>
+              <a:rPr sz="2400" b="0">
                 <a:solidFill>
                   <a:srgbClr val="1F2A44"/>
                 </a:solidFill>
                 <a:latin typeface="Nunito Sans"/>
               </a:rPr>
-              <a:t>«Un actor con bata lo recomienda»</a:t>
-            </a:r>
-          </a:p>
-          <a:p>
-            <a:pPr>
-              <a:spcAft>
-                <a:spcPts val="1170"/>
-              </a:spcAft>
-            </a:pPr>
-            <a:r>
-              <a:rPr sz="2600" b="1">
+              <a:t>¿Final? No volver a casa.</a:t>
+            </a:r>
+          </a:p>
+          <a:p>
+            <a:pPr>
+              <a:spcAft>
+                <a:spcPts val="1080"/>
+              </a:spcAft>
+            </a:pPr>
+            <a:r>
+              <a:rPr sz="2400" b="1">
                 <a:solidFill>
                   <a:srgbClr val="E8793A"/>
                 </a:solidFill>
                 <a:latin typeface="Nunito Sans"/>
               </a:rPr>
-              <a:t>• </a:t>
-            </a:r>
-            <a:r>
-              <a:rPr sz="2600" b="0">
+              <a:t>3. </a:t>
+            </a:r>
+            <a:r>
+              <a:rPr sz="2400" b="0">
                 <a:solidFill>
                   <a:srgbClr val="1F2A44"/>
                 </a:solidFill>
                 <a:latin typeface="Nunito Sans"/>
               </a:rPr>
-              <a:t>«Los expertos dicen…» (¿quiénes?)</a:t>
-            </a:r>
-          </a:p>
-        </p:txBody>
-      </p:sp>
-      <p:sp>
-        <p:nvSpPr>
-          <p:cNvPr id="7" name="Rectangle 6"/>
-          <p:cNvSpPr/>
-          <p:nvPr/>
-        </p:nvSpPr>
-        <p:spPr>
-          <a:xfrm>
-            <a:off x="6246000" y="1650000"/>
-            <a:ext cx="5306000" cy="4400000"/>
-          </a:xfrm>
-          <a:prstGeom prst="rect">
-            <a:avLst/>
-          </a:prstGeom>
-          <a:solidFill>
-            <a:srgbClr val="EAF0F7"/>
-          </a:solidFill>
-          <a:ln>
-            <a:noFill/>
-          </a:ln>
-        </p:spPr>
-        <p:style>
-          <a:lnRef idx="1">
-            <a:schemeClr val="accent1"/>
-          </a:lnRef>
-          <a:fillRef idx="3">
-            <a:schemeClr val="accent1"/>
-          </a:fillRef>
-          <a:effectRef idx="2">
-            <a:schemeClr val="accent1"/>
-          </a:effectRef>
-          <a:fontRef idx="minor">
-            <a:schemeClr val="lt1"/>
-          </a:fontRef>
-        </p:style>
-        <p:txBody>
-          <a:bodyPr rtlCol="0" anchor="ctr"/>
-          <a:lstStyle/>
-          <a:p>
-            <a:pPr algn="ctr"/>
-          </a:p>
-        </p:txBody>
-      </p:sp>
-      <p:sp>
-        <p:nvSpPr>
-          <p:cNvPr id="8" name="TextBox 7"/>
-          <p:cNvSpPr txBox="1"/>
-          <p:nvPr/>
-        </p:nvSpPr>
-        <p:spPr>
-          <a:xfrm>
-            <a:off x="6446000" y="1750000"/>
-            <a:ext cx="4906000" cy="600000"/>
-          </a:xfrm>
-          <a:prstGeom prst="rect">
-            <a:avLst/>
-          </a:prstGeom>
-          <a:noFill/>
-        </p:spPr>
-        <p:txBody>
-          <a:bodyPr wrap="square">
-            <a:spAutoFit/>
-          </a:bodyPr>
-          <a:lstStyle/>
-          <a:p>
-            <a:pPr>
-              <a:spcAft>
-                <a:spcPts val="1260"/>
-              </a:spcAft>
-            </a:pPr>
-            <a:r>
-              <a:rPr sz="2800" b="1">
-                <a:solidFill>
-                  <a:srgbClr val="2F6FB5"/>
-                </a:solidFill>
-                <a:latin typeface="Nunito Sans"/>
-              </a:rPr>
-              <a:t>Buena razón</a:t>
-            </a:r>
-          </a:p>
-        </p:txBody>
-      </p:sp>
-      <p:sp>
-        <p:nvSpPr>
-          <p:cNvPr id="9" name="TextBox 8"/>
-          <p:cNvSpPr txBox="1"/>
-          <p:nvPr/>
-        </p:nvSpPr>
-        <p:spPr>
-          <a:xfrm>
-            <a:off x="6446000" y="2400000"/>
-            <a:ext cx="4906000" cy="3500000"/>
-          </a:xfrm>
-          <a:prstGeom prst="rect">
-            <a:avLst/>
-          </a:prstGeom>
-          <a:noFill/>
-        </p:spPr>
-        <p:txBody>
-          <a:bodyPr wrap="square">
-            <a:spAutoFit/>
-          </a:bodyPr>
-          <a:lstStyle/>
-          <a:p>
-            <a:pPr>
-              <a:spcAft>
-                <a:spcPts val="1170"/>
-              </a:spcAft>
-            </a:pPr>
-            <a:r>
-              <a:rPr sz="2600" b="1">
+              <a:t>¿Un paso lleva seguro al siguiente? No: los padres pueden decir que no a las doce.</a:t>
+            </a:r>
+          </a:p>
+          <a:p>
+            <a:pPr>
+              <a:spcAft>
+                <a:spcPts val="1080"/>
+              </a:spcAft>
+            </a:pPr>
+            <a:r>
+              <a:rPr sz="2400" b="1">
                 <a:solidFill>
                   <a:srgbClr val="E8793A"/>
                 </a:solidFill>
                 <a:latin typeface="Nunito Sans"/>
               </a:rPr>
-              <a:t>• </a:t>
-            </a:r>
-            <a:r>
-              <a:rPr sz="2600" b="0">
+              <a:t>4. </a:t>
+            </a:r>
+            <a:r>
+              <a:rPr sz="2400" b="0">
                 <a:solidFill>
                   <a:srgbClr val="1F2A44"/>
                 </a:solidFill>
                 <a:latin typeface="Nunito Sans"/>
               </a:rPr>
-              <a:t>«Lo dice mi médica, que me ha examinado»</a:t>
-            </a:r>
-          </a:p>
-          <a:p>
-            <a:pPr>
-              <a:spcAft>
-                <a:spcPts val="1170"/>
-              </a:spcAft>
-            </a:pPr>
-            <a:r>
-              <a:rPr sz="2600" b="1">
-                <a:solidFill>
-                  <a:srgbClr val="E8793A"/>
-                </a:solidFill>
-                <a:latin typeface="Nunito Sans"/>
-              </a:rPr>
-              <a:t>• </a:t>
-            </a:r>
-            <a:r>
-              <a:rPr sz="2600" b="0">
-                <a:solidFill>
-                  <a:srgbClr val="1F2A44"/>
-                </a:solidFill>
-                <a:latin typeface="Nunito Sans"/>
-              </a:rPr>
-              <a:t>«Lo dicen casi todos los expertos del tema»</a:t>
-            </a:r>
-          </a:p>
-          <a:p>
-            <a:pPr>
-              <a:spcAft>
-                <a:spcPts val="1170"/>
-              </a:spcAft>
-            </a:pPr>
-            <a:r>
-              <a:rPr sz="2600" b="1">
-                <a:solidFill>
-                  <a:srgbClr val="E8793A"/>
-                </a:solidFill>
-                <a:latin typeface="Nunito Sans"/>
-              </a:rPr>
-              <a:t>• </a:t>
-            </a:r>
-            <a:r>
-              <a:rPr sz="2600" b="0">
-                <a:solidFill>
-                  <a:srgbClr val="1F2A44"/>
-                </a:solidFill>
-                <a:latin typeface="Nunito Sans"/>
-              </a:rPr>
-              <a:t>«El estudio explica cómo lo midió»</a:t>
-            </a:r>
-          </a:p>
-        </p:txBody>
-      </p:sp>
-    </p:spTree>
-  </p:cSld>
-  <p:clrMapOvr>
-    <a:masterClrMapping/>
-  </p:clrMapOvr>
-</p:sld>
-</file>
-
-<file path=ppt/slides/slide9.xml><?xml version="1.0" encoding="utf-8"?>
-<p:sld xmlns:a="http://schemas.openxmlformats.org/drawingml/2006/main" xmlns:p="http://schemas.openxmlformats.org/presentationml/2006/main" xmlns:r="http://schemas.openxmlformats.org/officeDocument/2006/relationships">
-  <p:cSld>
-    <p:bg>
-      <p:bgPr>
-        <a:solidFill>
-          <a:srgbClr val="1F2A44"/>
-        </a:solidFill>
-        <a:effectLst/>
-      </p:bgPr>
-    </p:bg>
-    <p:spTree>
-      <p:nvGrpSpPr>
-        <p:cNvPr id="1" name=""/>
-        <p:cNvGrpSpPr/>
-        <p:nvPr/>
-      </p:nvGrpSpPr>
-      <p:grpSpPr/>
-      <p:sp>
-        <p:nvSpPr>
-          <p:cNvPr id="2" name="TextBox 1"/>
-          <p:cNvSpPr txBox="1"/>
-          <p:nvPr/>
-        </p:nvSpPr>
-        <p:spPr>
-          <a:xfrm>
-            <a:off x="640000" y="2300000"/>
-            <a:ext cx="10912000" cy="500000"/>
-          </a:xfrm>
-          <a:prstGeom prst="rect">
-            <a:avLst/>
-          </a:prstGeom>
-          <a:noFill/>
-        </p:spPr>
-        <p:txBody>
-          <a:bodyPr wrap="square">
-            <a:spAutoFit/>
-          </a:bodyPr>
-          <a:lstStyle/>
-          <a:p>
-            <a:pPr>
-              <a:spcAft>
-                <a:spcPts val="810"/>
-              </a:spcAft>
-            </a:pPr>
-            <a:r>
-              <a:rPr sz="1800" b="1">
-                <a:solidFill>
-                  <a:srgbClr val="F4B183"/>
-                </a:solidFill>
-                <a:latin typeface="Nunito Sans"/>
-              </a:rPr>
-              <a:t>BLOQUE 2</a:t>
-            </a:r>
-          </a:p>
-        </p:txBody>
-      </p:sp>
-      <p:sp>
-        <p:nvSpPr>
-          <p:cNvPr id="3" name="TextBox 2"/>
-          <p:cNvSpPr txBox="1"/>
-          <p:nvPr/>
-        </p:nvSpPr>
-        <p:spPr>
-          <a:xfrm>
-            <a:off x="640000" y="2800000"/>
-            <a:ext cx="10912000" cy="800000"/>
-          </a:xfrm>
-          <a:prstGeom prst="rect">
-            <a:avLst/>
-          </a:prstGeom>
-          <a:noFill/>
-        </p:spPr>
-        <p:txBody>
-          <a:bodyPr wrap="square">
-            <a:spAutoFit/>
-          </a:bodyPr>
-          <a:lstStyle/>
-          <a:p>
-            <a:pPr>
-              <a:spcAft>
-                <a:spcPts val="2160"/>
-              </a:spcAft>
-            </a:pPr>
-            <a:r>
-              <a:rPr sz="4800" b="1">
-                <a:solidFill>
-                  <a:srgbClr val="FBF7EF"/>
-                </a:solidFill>
-                <a:latin typeface="Fredoka"/>
-              </a:rPr>
-              <a:t>Casos resueltos</a:t>
+              <a:t>Conclusión: pendiente resbaladiza. Se puede hablar del primer paso sin saltar al final.</a:t>
             </a:r>
           </a:p>
         </p:txBody>
